--- a/2026/OpenSourceModulesInCSharp/PSCONFEU26_EmanuelPalm_OpenSourceModulesInCSharp.pptx
+++ b/2026/OpenSourceModulesInCSharp/PSCONFEU26_EmanuelPalm_OpenSourceModulesInCSharp.pptx
@@ -8,10 +8,10 @@
     <p:sldMasterId id="2147483684" r:id="rId7"/>
   </p:sldMasterIdLst>
   <p:notesMasterIdLst>
-    <p:notesMasterId r:id="rId33"/>
+    <p:notesMasterId r:id="rId34"/>
   </p:notesMasterIdLst>
   <p:handoutMasterIdLst>
-    <p:handoutMasterId r:id="rId34"/>
+    <p:handoutMasterId r:id="rId35"/>
   </p:handoutMasterIdLst>
   <p:sldIdLst>
     <p:sldId id="271" r:id="rId8"/>
@@ -36,9 +36,10 @@
     <p:sldId id="284" r:id="rId27"/>
     <p:sldId id="287" r:id="rId28"/>
     <p:sldId id="341" r:id="rId29"/>
-    <p:sldId id="325" r:id="rId30"/>
-    <p:sldId id="343" r:id="rId31"/>
-    <p:sldId id="274" r:id="rId32"/>
+    <p:sldId id="344" r:id="rId30"/>
+    <p:sldId id="345" r:id="rId31"/>
+    <p:sldId id="346" r:id="rId32"/>
+    <p:sldId id="274" r:id="rId33"/>
   </p:sldIdLst>
   <p:sldSz cx="12192000" cy="6858000"/>
   <p:notesSz cx="6858000" cy="9144000"/>
@@ -168,8 +169,9 @@
             <p14:sldId id="284"/>
             <p14:sldId id="287"/>
             <p14:sldId id="341"/>
-            <p14:sldId id="325"/>
-            <p14:sldId id="343"/>
+            <p14:sldId id="344"/>
+            <p14:sldId id="345"/>
+            <p14:sldId id="346"/>
             <p14:sldId id="274"/>
           </p14:sldIdLst>
         </p14:section>
@@ -276,7 +278,7 @@
           <a:p>
             <a:fld id="{69440670-43D7-400A-ABC5-B69E064DBB37}" type="datetimeFigureOut">
               <a:rPr lang="en-GB" smtClean="0"/>
-              <a:t>06/05/2026</a:t>
+              <a:t>14/05/2026</a:t>
             </a:fld>
             <a:endParaRPr lang="en-GB"/>
           </a:p>
@@ -535,7 +537,7 @@
           <a:p>
             <a:fld id="{611B03A4-75C9-4E3D-9183-2102CA9AEC33}" type="datetimeFigureOut">
               <a:rPr lang="en-GB" smtClean="0"/>
-              <a:t>06/05/2026</a:t>
+              <a:t>14/05/2026</a:t>
             </a:fld>
             <a:endParaRPr lang="en-GB"/>
           </a:p>
@@ -1481,118 +1483,6 @@
   <p:cSld>
     <p:spTree>
       <p:nvGrpSpPr>
-        <p:cNvPr id="1" name="">
-          <a:extLst>
-            <a:ext uri="{FF2B5EF4-FFF2-40B4-BE49-F238E27FC236}">
-              <a16:creationId xmlns:a16="http://schemas.microsoft.com/office/drawing/2014/main" id="{319BB132-24C8-AE0A-90B5-93EAE7E67A31}"/>
-            </a:ext>
-          </a:extLst>
-        </p:cNvPr>
-        <p:cNvGrpSpPr/>
-        <p:nvPr/>
-      </p:nvGrpSpPr>
-      <p:grpSpPr>
-        <a:xfrm>
-          <a:off x="0" y="0"/>
-          <a:ext cx="0" cy="0"/>
-          <a:chOff x="0" y="0"/>
-          <a:chExt cx="0" cy="0"/>
-        </a:xfrm>
-      </p:grpSpPr>
-      <p:sp>
-        <p:nvSpPr>
-          <p:cNvPr id="2" name="Slide Image Placeholder 1">
-            <a:extLst>
-              <a:ext uri="{FF2B5EF4-FFF2-40B4-BE49-F238E27FC236}">
-                <a16:creationId xmlns:a16="http://schemas.microsoft.com/office/drawing/2014/main" id="{2D2A1C77-7C29-F406-0A7F-46142069C772}"/>
-              </a:ext>
-            </a:extLst>
-          </p:cNvPr>
-          <p:cNvSpPr>
-            <a:spLocks noGrp="1" noRot="1" noChangeAspect="1"/>
-          </p:cNvSpPr>
-          <p:nvPr>
-            <p:ph type="sldImg"/>
-          </p:nvPr>
-        </p:nvSpPr>
-        <p:spPr/>
-      </p:sp>
-      <p:sp>
-        <p:nvSpPr>
-          <p:cNvPr id="3" name="Notes Placeholder 2">
-            <a:extLst>
-              <a:ext uri="{FF2B5EF4-FFF2-40B4-BE49-F238E27FC236}">
-                <a16:creationId xmlns:a16="http://schemas.microsoft.com/office/drawing/2014/main" id="{84349D2C-BAC0-50DD-C455-B9B0F74CF7BB}"/>
-              </a:ext>
-            </a:extLst>
-          </p:cNvPr>
-          <p:cNvSpPr>
-            <a:spLocks noGrp="1"/>
-          </p:cNvSpPr>
-          <p:nvPr>
-            <p:ph type="body" idx="1"/>
-          </p:nvPr>
-        </p:nvSpPr>
-        <p:spPr/>
-        <p:txBody>
-          <a:bodyPr/>
-          <a:lstStyle/>
-          <a:p>
-            <a:pPr marL="914400" lvl="1" indent="-457200">
-              <a:buFont typeface="+mj-lt"/>
-              <a:buAutoNum type="arabicPeriod"/>
-            </a:pPr>
-            <a:endParaRPr lang="en-GB" dirty="0"/>
-          </a:p>
-        </p:txBody>
-      </p:sp>
-      <p:sp>
-        <p:nvSpPr>
-          <p:cNvPr id="4" name="Slide Number Placeholder 3">
-            <a:extLst>
-              <a:ext uri="{FF2B5EF4-FFF2-40B4-BE49-F238E27FC236}">
-                <a16:creationId xmlns:a16="http://schemas.microsoft.com/office/drawing/2014/main" id="{F1B2F6D5-997E-19E6-6277-BECB52F3FA2B}"/>
-              </a:ext>
-            </a:extLst>
-          </p:cNvPr>
-          <p:cNvSpPr>
-            <a:spLocks noGrp="1"/>
-          </p:cNvSpPr>
-          <p:nvPr>
-            <p:ph type="sldNum" sz="quarter" idx="5"/>
-          </p:nvPr>
-        </p:nvSpPr>
-        <p:spPr/>
-        <p:txBody>
-          <a:bodyPr/>
-          <a:lstStyle/>
-          <a:p>
-            <a:fld id="{A7839206-A81D-4F76-8486-302187992F73}" type="slidenum">
-              <a:rPr lang="en-GB" smtClean="0"/>
-              <a:t>23</a:t>
-            </a:fld>
-            <a:endParaRPr lang="en-GB"/>
-          </a:p>
-        </p:txBody>
-      </p:sp>
-    </p:spTree>
-    <p:extLst>
-      <p:ext uri="{BB962C8B-B14F-4D97-AF65-F5344CB8AC3E}">
-        <p14:creationId xmlns:p14="http://schemas.microsoft.com/office/powerpoint/2010/main" val="364806960"/>
-      </p:ext>
-    </p:extLst>
-  </p:cSld>
-  <p:clrMapOvr>
-    <a:masterClrMapping/>
-  </p:clrMapOvr>
-</p:notes>
-</file>
-
-<file path=ppt/notesSlides/notesSlide11.xml><?xml version="1.0" encoding="utf-8"?>
-<p:notes xmlns:a="http://schemas.openxmlformats.org/drawingml/2006/main" xmlns:r="http://schemas.openxmlformats.org/officeDocument/2006/relationships" xmlns:p="http://schemas.openxmlformats.org/presentationml/2006/main">
-  <p:cSld>
-    <p:spTree>
-      <p:nvGrpSpPr>
         <p:cNvPr id="1" name=""/>
         <p:cNvGrpSpPr/>
         <p:nvPr/>
@@ -1653,7 +1543,7 @@
           <a:p>
             <a:fld id="{A7839206-A81D-4F76-8486-302187992F73}" type="slidenum">
               <a:rPr lang="en-GB" smtClean="0"/>
-              <a:t>25</a:t>
+              <a:t>26</a:t>
             </a:fld>
             <a:endParaRPr lang="en-GB"/>
           </a:p>
@@ -2492,199 +2382,6 @@
 </file>
 
 <file path=ppt/slideLayouts/slideLayout10.xml><?xml version="1.0" encoding="utf-8"?>
-<p:sldLayout xmlns:a="http://schemas.openxmlformats.org/drawingml/2006/main" xmlns:r="http://schemas.openxmlformats.org/officeDocument/2006/relationships" xmlns:p="http://schemas.openxmlformats.org/presentationml/2006/main" type="secHead" preserve="1">
-  <p:cSld name="Section Header">
-    <p:spTree>
-      <p:nvGrpSpPr>
-        <p:cNvPr id="1" name=""/>
-        <p:cNvGrpSpPr/>
-        <p:nvPr/>
-      </p:nvGrpSpPr>
-      <p:grpSpPr>
-        <a:xfrm>
-          <a:off x="0" y="0"/>
-          <a:ext cx="0" cy="0"/>
-          <a:chOff x="0" y="0"/>
-          <a:chExt cx="0" cy="0"/>
-        </a:xfrm>
-      </p:grpSpPr>
-      <p:sp>
-        <p:nvSpPr>
-          <p:cNvPr id="2" name="Title 1">
-            <a:extLst>
-              <a:ext uri="{FF2B5EF4-FFF2-40B4-BE49-F238E27FC236}">
-                <a16:creationId xmlns:a16="http://schemas.microsoft.com/office/drawing/2014/main" id="{A7093987-4D9C-734A-F0DD-FA7C5E5BFDFF}"/>
-              </a:ext>
-            </a:extLst>
-          </p:cNvPr>
-          <p:cNvSpPr>
-            <a:spLocks noGrp="1"/>
-          </p:cNvSpPr>
-          <p:nvPr>
-            <p:ph type="title"/>
-          </p:nvPr>
-        </p:nvSpPr>
-        <p:spPr>
-          <a:xfrm>
-            <a:off x="831850" y="1709738"/>
-            <a:ext cx="10515600" cy="2852737"/>
-          </a:xfrm>
-        </p:spPr>
-        <p:txBody>
-          <a:bodyPr anchor="b"/>
-          <a:lstStyle>
-            <a:lvl1pPr>
-              <a:defRPr sz="6000"/>
-            </a:lvl1pPr>
-          </a:lstStyle>
-          <a:p>
-            <a:r>
-              <a:rPr lang="en-US"/>
-              <a:t>Click to edit Master title style</a:t>
-            </a:r>
-            <a:endParaRPr lang="en-GB"/>
-          </a:p>
-        </p:txBody>
-      </p:sp>
-      <p:sp>
-        <p:nvSpPr>
-          <p:cNvPr id="3" name="Text Placeholder 2">
-            <a:extLst>
-              <a:ext uri="{FF2B5EF4-FFF2-40B4-BE49-F238E27FC236}">
-                <a16:creationId xmlns:a16="http://schemas.microsoft.com/office/drawing/2014/main" id="{A48C8F2A-06F7-926F-11A3-0E18B5E0126B}"/>
-              </a:ext>
-            </a:extLst>
-          </p:cNvPr>
-          <p:cNvSpPr>
-            <a:spLocks noGrp="1"/>
-          </p:cNvSpPr>
-          <p:nvPr>
-            <p:ph type="body" idx="1"/>
-          </p:nvPr>
-        </p:nvSpPr>
-        <p:spPr>
-          <a:xfrm>
-            <a:off x="831850" y="4589463"/>
-            <a:ext cx="10515600" cy="1500187"/>
-          </a:xfrm>
-        </p:spPr>
-        <p:txBody>
-          <a:bodyPr/>
-          <a:lstStyle>
-            <a:lvl1pPr marL="0" indent="0">
-              <a:buNone/>
-              <a:defRPr sz="2400">
-                <a:solidFill>
-                  <a:schemeClr val="tx1">
-                    <a:tint val="75000"/>
-                  </a:schemeClr>
-                </a:solidFill>
-              </a:defRPr>
-            </a:lvl1pPr>
-            <a:lvl2pPr marL="457200" indent="0">
-              <a:buNone/>
-              <a:defRPr sz="2000">
-                <a:solidFill>
-                  <a:schemeClr val="tx1">
-                    <a:tint val="75000"/>
-                  </a:schemeClr>
-                </a:solidFill>
-              </a:defRPr>
-            </a:lvl2pPr>
-            <a:lvl3pPr marL="914400" indent="0">
-              <a:buNone/>
-              <a:defRPr sz="1800">
-                <a:solidFill>
-                  <a:schemeClr val="tx1">
-                    <a:tint val="75000"/>
-                  </a:schemeClr>
-                </a:solidFill>
-              </a:defRPr>
-            </a:lvl3pPr>
-            <a:lvl4pPr marL="1371600" indent="0">
-              <a:buNone/>
-              <a:defRPr sz="1600">
-                <a:solidFill>
-                  <a:schemeClr val="tx1">
-                    <a:tint val="75000"/>
-                  </a:schemeClr>
-                </a:solidFill>
-              </a:defRPr>
-            </a:lvl4pPr>
-            <a:lvl5pPr marL="1828800" indent="0">
-              <a:buNone/>
-              <a:defRPr sz="1600">
-                <a:solidFill>
-                  <a:schemeClr val="tx1">
-                    <a:tint val="75000"/>
-                  </a:schemeClr>
-                </a:solidFill>
-              </a:defRPr>
-            </a:lvl5pPr>
-            <a:lvl6pPr marL="2286000" indent="0">
-              <a:buNone/>
-              <a:defRPr sz="1600">
-                <a:solidFill>
-                  <a:schemeClr val="tx1">
-                    <a:tint val="75000"/>
-                  </a:schemeClr>
-                </a:solidFill>
-              </a:defRPr>
-            </a:lvl6pPr>
-            <a:lvl7pPr marL="2743200" indent="0">
-              <a:buNone/>
-              <a:defRPr sz="1600">
-                <a:solidFill>
-                  <a:schemeClr val="tx1">
-                    <a:tint val="75000"/>
-                  </a:schemeClr>
-                </a:solidFill>
-              </a:defRPr>
-            </a:lvl7pPr>
-            <a:lvl8pPr marL="3200400" indent="0">
-              <a:buNone/>
-              <a:defRPr sz="1600">
-                <a:solidFill>
-                  <a:schemeClr val="tx1">
-                    <a:tint val="75000"/>
-                  </a:schemeClr>
-                </a:solidFill>
-              </a:defRPr>
-            </a:lvl8pPr>
-            <a:lvl9pPr marL="3657600" indent="0">
-              <a:buNone/>
-              <a:defRPr sz="1600">
-                <a:solidFill>
-                  <a:schemeClr val="tx1">
-                    <a:tint val="75000"/>
-                  </a:schemeClr>
-                </a:solidFill>
-              </a:defRPr>
-            </a:lvl9pPr>
-          </a:lstStyle>
-          <a:p>
-            <a:pPr lvl="0"/>
-            <a:r>
-              <a:rPr lang="en-US"/>
-              <a:t>Click to edit Master text styles</a:t>
-            </a:r>
-          </a:p>
-        </p:txBody>
-      </p:sp>
-    </p:spTree>
-    <p:extLst>
-      <p:ext uri="{BB962C8B-B14F-4D97-AF65-F5344CB8AC3E}">
-        <p14:creationId xmlns:p14="http://schemas.microsoft.com/office/powerpoint/2010/main" val="3547603299"/>
-      </p:ext>
-    </p:extLst>
-  </p:cSld>
-  <p:clrMapOvr>
-    <a:masterClrMapping/>
-  </p:clrMapOvr>
-</p:sldLayout>
-</file>
-
-<file path=ppt/slideLayouts/slideLayout11.xml><?xml version="1.0" encoding="utf-8"?>
 <p:sldLayout xmlns:a="http://schemas.openxmlformats.org/drawingml/2006/main" xmlns:r="http://schemas.openxmlformats.org/officeDocument/2006/relationships" xmlns:p="http://schemas.openxmlformats.org/presentationml/2006/main" type="twoObj" preserve="1">
   <p:cSld name="Two Content">
     <p:spTree>
@@ -2869,7 +2566,7 @@
 </p:sldLayout>
 </file>
 
-<file path=ppt/slideLayouts/slideLayout12.xml><?xml version="1.0" encoding="utf-8"?>
+<file path=ppt/slideLayouts/slideLayout11.xml><?xml version="1.0" encoding="utf-8"?>
 <p:sldLayout xmlns:a="http://schemas.openxmlformats.org/drawingml/2006/main" xmlns:r="http://schemas.openxmlformats.org/officeDocument/2006/relationships" xmlns:p="http://schemas.openxmlformats.org/presentationml/2006/main" type="twoTxTwoObj" preserve="1">
   <p:cSld name="Comparison">
     <p:spTree>
@@ -3201,7 +2898,7 @@
 </p:sldLayout>
 </file>
 
-<file path=ppt/slideLayouts/slideLayout13.xml><?xml version="1.0" encoding="utf-8"?>
+<file path=ppt/slideLayouts/slideLayout12.xml><?xml version="1.0" encoding="utf-8"?>
 <p:sldLayout xmlns:a="http://schemas.openxmlformats.org/drawingml/2006/main" xmlns:r="http://schemas.openxmlformats.org/officeDocument/2006/relationships" xmlns:p="http://schemas.openxmlformats.org/presentationml/2006/main" type="titleOnly" preserve="1">
   <p:cSld name="Title Only">
     <p:spTree>
@@ -3260,7 +2957,7 @@
 </p:sldLayout>
 </file>
 
-<file path=ppt/slideLayouts/slideLayout14.xml><?xml version="1.0" encoding="utf-8"?>
+<file path=ppt/slideLayouts/slideLayout13.xml><?xml version="1.0" encoding="utf-8"?>
 <p:sldLayout xmlns:a="http://schemas.openxmlformats.org/drawingml/2006/main" xmlns:r="http://schemas.openxmlformats.org/officeDocument/2006/relationships" xmlns:p="http://schemas.openxmlformats.org/presentationml/2006/main" type="blank" preserve="1">
   <p:cSld name="Blank">
     <p:spTree>
@@ -3290,7 +2987,7 @@
 </p:sldLayout>
 </file>
 
-<file path=ppt/slideLayouts/slideLayout15.xml><?xml version="1.0" encoding="utf-8"?>
+<file path=ppt/slideLayouts/slideLayout14.xml><?xml version="1.0" encoding="utf-8"?>
 <p:sldLayout xmlns:a="http://schemas.openxmlformats.org/drawingml/2006/main" xmlns:r="http://schemas.openxmlformats.org/officeDocument/2006/relationships" xmlns:p="http://schemas.openxmlformats.org/presentationml/2006/main" type="objTx" preserve="1">
   <p:cSld name="Content with Caption">
     <p:spTree>
@@ -3520,7 +3217,7 @@
 </p:sldLayout>
 </file>
 
-<file path=ppt/slideLayouts/slideLayout16.xml><?xml version="1.0" encoding="utf-8"?>
+<file path=ppt/slideLayouts/slideLayout15.xml><?xml version="1.0" encoding="utf-8"?>
 <p:sldLayout xmlns:a="http://schemas.openxmlformats.org/drawingml/2006/main" xmlns:r="http://schemas.openxmlformats.org/officeDocument/2006/relationships" xmlns:p="http://schemas.openxmlformats.org/presentationml/2006/main" type="picTx" preserve="1">
   <p:cSld name="Picture with Caption">
     <p:spTree>
@@ -3726,7 +3423,7 @@
 </p:sldLayout>
 </file>
 
-<file path=ppt/slideLayouts/slideLayout17.xml><?xml version="1.0" encoding="utf-8"?>
+<file path=ppt/slideLayouts/slideLayout16.xml><?xml version="1.0" encoding="utf-8"?>
 <p:sldLayout xmlns:a="http://schemas.openxmlformats.org/drawingml/2006/main" xmlns:r="http://schemas.openxmlformats.org/officeDocument/2006/relationships" xmlns:p="http://schemas.openxmlformats.org/presentationml/2006/main" type="vertTx" preserve="1">
   <p:cSld name="Title and Vertical Text">
     <p:spTree>
@@ -3843,7 +3540,7 @@
 </p:sldLayout>
 </file>
 
-<file path=ppt/slideLayouts/slideLayout18.xml><?xml version="1.0" encoding="utf-8"?>
+<file path=ppt/slideLayouts/slideLayout17.xml><?xml version="1.0" encoding="utf-8"?>
 <p:sldLayout xmlns:a="http://schemas.openxmlformats.org/drawingml/2006/main" xmlns:r="http://schemas.openxmlformats.org/officeDocument/2006/relationships" xmlns:p="http://schemas.openxmlformats.org/presentationml/2006/main" userDrawn="1">
   <p:cSld name="Disposition personnalisée">
     <p:spTree>
@@ -4198,199 +3895,6 @@
 </file>
 
 <file path=ppt/slideLayouts/slideLayout7.xml><?xml version="1.0" encoding="utf-8"?>
-<p:sldLayout xmlns:a="http://schemas.openxmlformats.org/drawingml/2006/main" xmlns:r="http://schemas.openxmlformats.org/officeDocument/2006/relationships" xmlns:p="http://schemas.openxmlformats.org/presentationml/2006/main" type="secHead">
-  <p:cSld name="Section Header">
-    <p:spTree>
-      <p:nvGrpSpPr>
-        <p:cNvPr id="1" name=""/>
-        <p:cNvGrpSpPr/>
-        <p:nvPr/>
-      </p:nvGrpSpPr>
-      <p:grpSpPr>
-        <a:xfrm>
-          <a:off x="0" y="0"/>
-          <a:ext cx="0" cy="0"/>
-          <a:chOff x="0" y="0"/>
-          <a:chExt cx="0" cy="0"/>
-        </a:xfrm>
-      </p:grpSpPr>
-      <p:sp>
-        <p:nvSpPr>
-          <p:cNvPr id="2" name="Title 1">
-            <a:extLst>
-              <a:ext uri="{FF2B5EF4-FFF2-40B4-BE49-F238E27FC236}">
-                <a16:creationId xmlns:a16="http://schemas.microsoft.com/office/drawing/2014/main" id="{A7093987-4D9C-734A-F0DD-FA7C5E5BFDFF}"/>
-              </a:ext>
-            </a:extLst>
-          </p:cNvPr>
-          <p:cNvSpPr>
-            <a:spLocks noGrp="1"/>
-          </p:cNvSpPr>
-          <p:nvPr>
-            <p:ph type="title"/>
-          </p:nvPr>
-        </p:nvSpPr>
-        <p:spPr>
-          <a:xfrm>
-            <a:off x="831850" y="1709738"/>
-            <a:ext cx="10515600" cy="2852737"/>
-          </a:xfrm>
-        </p:spPr>
-        <p:txBody>
-          <a:bodyPr anchor="b"/>
-          <a:lstStyle>
-            <a:lvl1pPr>
-              <a:defRPr sz="6000"/>
-            </a:lvl1pPr>
-          </a:lstStyle>
-          <a:p>
-            <a:r>
-              <a:rPr lang="en-US"/>
-              <a:t>Click to edit Master title style</a:t>
-            </a:r>
-            <a:endParaRPr lang="en-GB"/>
-          </a:p>
-        </p:txBody>
-      </p:sp>
-      <p:sp>
-        <p:nvSpPr>
-          <p:cNvPr id="3" name="Text Placeholder 2">
-            <a:extLst>
-              <a:ext uri="{FF2B5EF4-FFF2-40B4-BE49-F238E27FC236}">
-                <a16:creationId xmlns:a16="http://schemas.microsoft.com/office/drawing/2014/main" id="{A48C8F2A-06F7-926F-11A3-0E18B5E0126B}"/>
-              </a:ext>
-            </a:extLst>
-          </p:cNvPr>
-          <p:cNvSpPr>
-            <a:spLocks noGrp="1"/>
-          </p:cNvSpPr>
-          <p:nvPr>
-            <p:ph type="body" idx="1"/>
-          </p:nvPr>
-        </p:nvSpPr>
-        <p:spPr>
-          <a:xfrm>
-            <a:off x="831850" y="4589463"/>
-            <a:ext cx="10515600" cy="1500187"/>
-          </a:xfrm>
-        </p:spPr>
-        <p:txBody>
-          <a:bodyPr/>
-          <a:lstStyle>
-            <a:lvl1pPr marL="0" indent="0">
-              <a:buNone/>
-              <a:defRPr sz="2400">
-                <a:solidFill>
-                  <a:schemeClr val="tx1">
-                    <a:tint val="75000"/>
-                  </a:schemeClr>
-                </a:solidFill>
-              </a:defRPr>
-            </a:lvl1pPr>
-            <a:lvl2pPr marL="457200" indent="0">
-              <a:buNone/>
-              <a:defRPr sz="2000">
-                <a:solidFill>
-                  <a:schemeClr val="tx1">
-                    <a:tint val="75000"/>
-                  </a:schemeClr>
-                </a:solidFill>
-              </a:defRPr>
-            </a:lvl2pPr>
-            <a:lvl3pPr marL="914400" indent="0">
-              <a:buNone/>
-              <a:defRPr sz="1800">
-                <a:solidFill>
-                  <a:schemeClr val="tx1">
-                    <a:tint val="75000"/>
-                  </a:schemeClr>
-                </a:solidFill>
-              </a:defRPr>
-            </a:lvl3pPr>
-            <a:lvl4pPr marL="1371600" indent="0">
-              <a:buNone/>
-              <a:defRPr sz="1600">
-                <a:solidFill>
-                  <a:schemeClr val="tx1">
-                    <a:tint val="75000"/>
-                  </a:schemeClr>
-                </a:solidFill>
-              </a:defRPr>
-            </a:lvl4pPr>
-            <a:lvl5pPr marL="1828800" indent="0">
-              <a:buNone/>
-              <a:defRPr sz="1600">
-                <a:solidFill>
-                  <a:schemeClr val="tx1">
-                    <a:tint val="75000"/>
-                  </a:schemeClr>
-                </a:solidFill>
-              </a:defRPr>
-            </a:lvl5pPr>
-            <a:lvl6pPr marL="2286000" indent="0">
-              <a:buNone/>
-              <a:defRPr sz="1600">
-                <a:solidFill>
-                  <a:schemeClr val="tx1">
-                    <a:tint val="75000"/>
-                  </a:schemeClr>
-                </a:solidFill>
-              </a:defRPr>
-            </a:lvl6pPr>
-            <a:lvl7pPr marL="2743200" indent="0">
-              <a:buNone/>
-              <a:defRPr sz="1600">
-                <a:solidFill>
-                  <a:schemeClr val="tx1">
-                    <a:tint val="75000"/>
-                  </a:schemeClr>
-                </a:solidFill>
-              </a:defRPr>
-            </a:lvl7pPr>
-            <a:lvl8pPr marL="3200400" indent="0">
-              <a:buNone/>
-              <a:defRPr sz="1600">
-                <a:solidFill>
-                  <a:schemeClr val="tx1">
-                    <a:tint val="75000"/>
-                  </a:schemeClr>
-                </a:solidFill>
-              </a:defRPr>
-            </a:lvl8pPr>
-            <a:lvl9pPr marL="3657600" indent="0">
-              <a:buNone/>
-              <a:defRPr sz="1600">
-                <a:solidFill>
-                  <a:schemeClr val="tx1">
-                    <a:tint val="75000"/>
-                  </a:schemeClr>
-                </a:solidFill>
-              </a:defRPr>
-            </a:lvl9pPr>
-          </a:lstStyle>
-          <a:p>
-            <a:pPr lvl="0"/>
-            <a:r>
-              <a:rPr lang="en-US"/>
-              <a:t>Click to edit Master text styles</a:t>
-            </a:r>
-          </a:p>
-        </p:txBody>
-      </p:sp>
-    </p:spTree>
-    <p:extLst>
-      <p:ext uri="{BB962C8B-B14F-4D97-AF65-F5344CB8AC3E}">
-        <p14:creationId xmlns:p14="http://schemas.microsoft.com/office/powerpoint/2010/main" val="1847425061"/>
-      </p:ext>
-    </p:extLst>
-  </p:cSld>
-  <p:clrMapOvr>
-    <a:masterClrMapping/>
-  </p:clrMapOvr>
-</p:sldLayout>
-</file>
-
-<file path=ppt/slideLayouts/slideLayout8.xml><?xml version="1.0" encoding="utf-8"?>
 <p:sldLayout xmlns:a="http://schemas.openxmlformats.org/drawingml/2006/main" xmlns:r="http://schemas.openxmlformats.org/officeDocument/2006/relationships" xmlns:p="http://schemas.openxmlformats.org/presentationml/2006/main" type="title" preserve="1">
   <p:cSld name="Title Slide">
     <p:spTree>
@@ -4529,7 +4033,7 @@
 </p:sldLayout>
 </file>
 
-<file path=ppt/slideLayouts/slideLayout9.xml><?xml version="1.0" encoding="utf-8"?>
+<file path=ppt/slideLayouts/slideLayout8.xml><?xml version="1.0" encoding="utf-8"?>
 <p:sldLayout xmlns:a="http://schemas.openxmlformats.org/drawingml/2006/main" xmlns:r="http://schemas.openxmlformats.org/officeDocument/2006/relationships" xmlns:p="http://schemas.openxmlformats.org/presentationml/2006/main" type="obj" preserve="1">
   <p:cSld name="Title and Content">
     <p:spTree>
@@ -4637,6 +4141,199 @@
     <p:extLst>
       <p:ext uri="{BB962C8B-B14F-4D97-AF65-F5344CB8AC3E}">
         <p14:creationId xmlns:p14="http://schemas.microsoft.com/office/powerpoint/2010/main" val="132802436"/>
+      </p:ext>
+    </p:extLst>
+  </p:cSld>
+  <p:clrMapOvr>
+    <a:masterClrMapping/>
+  </p:clrMapOvr>
+</p:sldLayout>
+</file>
+
+<file path=ppt/slideLayouts/slideLayout9.xml><?xml version="1.0" encoding="utf-8"?>
+<p:sldLayout xmlns:a="http://schemas.openxmlformats.org/drawingml/2006/main" xmlns:r="http://schemas.openxmlformats.org/officeDocument/2006/relationships" xmlns:p="http://schemas.openxmlformats.org/presentationml/2006/main" type="secHead" preserve="1">
+  <p:cSld name="Section Header">
+    <p:spTree>
+      <p:nvGrpSpPr>
+        <p:cNvPr id="1" name=""/>
+        <p:cNvGrpSpPr/>
+        <p:nvPr/>
+      </p:nvGrpSpPr>
+      <p:grpSpPr>
+        <a:xfrm>
+          <a:off x="0" y="0"/>
+          <a:ext cx="0" cy="0"/>
+          <a:chOff x="0" y="0"/>
+          <a:chExt cx="0" cy="0"/>
+        </a:xfrm>
+      </p:grpSpPr>
+      <p:sp>
+        <p:nvSpPr>
+          <p:cNvPr id="2" name="Title 1">
+            <a:extLst>
+              <a:ext uri="{FF2B5EF4-FFF2-40B4-BE49-F238E27FC236}">
+                <a16:creationId xmlns:a16="http://schemas.microsoft.com/office/drawing/2014/main" id="{A7093987-4D9C-734A-F0DD-FA7C5E5BFDFF}"/>
+              </a:ext>
+            </a:extLst>
+          </p:cNvPr>
+          <p:cNvSpPr>
+            <a:spLocks noGrp="1"/>
+          </p:cNvSpPr>
+          <p:nvPr>
+            <p:ph type="title"/>
+          </p:nvPr>
+        </p:nvSpPr>
+        <p:spPr>
+          <a:xfrm>
+            <a:off x="831850" y="1709738"/>
+            <a:ext cx="10515600" cy="2852737"/>
+          </a:xfrm>
+        </p:spPr>
+        <p:txBody>
+          <a:bodyPr anchor="b"/>
+          <a:lstStyle>
+            <a:lvl1pPr>
+              <a:defRPr sz="6000"/>
+            </a:lvl1pPr>
+          </a:lstStyle>
+          <a:p>
+            <a:r>
+              <a:rPr lang="en-US"/>
+              <a:t>Click to edit Master title style</a:t>
+            </a:r>
+            <a:endParaRPr lang="en-GB"/>
+          </a:p>
+        </p:txBody>
+      </p:sp>
+      <p:sp>
+        <p:nvSpPr>
+          <p:cNvPr id="3" name="Text Placeholder 2">
+            <a:extLst>
+              <a:ext uri="{FF2B5EF4-FFF2-40B4-BE49-F238E27FC236}">
+                <a16:creationId xmlns:a16="http://schemas.microsoft.com/office/drawing/2014/main" id="{A48C8F2A-06F7-926F-11A3-0E18B5E0126B}"/>
+              </a:ext>
+            </a:extLst>
+          </p:cNvPr>
+          <p:cNvSpPr>
+            <a:spLocks noGrp="1"/>
+          </p:cNvSpPr>
+          <p:nvPr>
+            <p:ph type="body" idx="1"/>
+          </p:nvPr>
+        </p:nvSpPr>
+        <p:spPr>
+          <a:xfrm>
+            <a:off x="831850" y="4589463"/>
+            <a:ext cx="10515600" cy="1500187"/>
+          </a:xfrm>
+        </p:spPr>
+        <p:txBody>
+          <a:bodyPr/>
+          <a:lstStyle>
+            <a:lvl1pPr marL="0" indent="0">
+              <a:buNone/>
+              <a:defRPr sz="2400">
+                <a:solidFill>
+                  <a:schemeClr val="tx1">
+                    <a:tint val="75000"/>
+                  </a:schemeClr>
+                </a:solidFill>
+              </a:defRPr>
+            </a:lvl1pPr>
+            <a:lvl2pPr marL="457200" indent="0">
+              <a:buNone/>
+              <a:defRPr sz="2000">
+                <a:solidFill>
+                  <a:schemeClr val="tx1">
+                    <a:tint val="75000"/>
+                  </a:schemeClr>
+                </a:solidFill>
+              </a:defRPr>
+            </a:lvl2pPr>
+            <a:lvl3pPr marL="914400" indent="0">
+              <a:buNone/>
+              <a:defRPr sz="1800">
+                <a:solidFill>
+                  <a:schemeClr val="tx1">
+                    <a:tint val="75000"/>
+                  </a:schemeClr>
+                </a:solidFill>
+              </a:defRPr>
+            </a:lvl3pPr>
+            <a:lvl4pPr marL="1371600" indent="0">
+              <a:buNone/>
+              <a:defRPr sz="1600">
+                <a:solidFill>
+                  <a:schemeClr val="tx1">
+                    <a:tint val="75000"/>
+                  </a:schemeClr>
+                </a:solidFill>
+              </a:defRPr>
+            </a:lvl4pPr>
+            <a:lvl5pPr marL="1828800" indent="0">
+              <a:buNone/>
+              <a:defRPr sz="1600">
+                <a:solidFill>
+                  <a:schemeClr val="tx1">
+                    <a:tint val="75000"/>
+                  </a:schemeClr>
+                </a:solidFill>
+              </a:defRPr>
+            </a:lvl5pPr>
+            <a:lvl6pPr marL="2286000" indent="0">
+              <a:buNone/>
+              <a:defRPr sz="1600">
+                <a:solidFill>
+                  <a:schemeClr val="tx1">
+                    <a:tint val="75000"/>
+                  </a:schemeClr>
+                </a:solidFill>
+              </a:defRPr>
+            </a:lvl6pPr>
+            <a:lvl7pPr marL="2743200" indent="0">
+              <a:buNone/>
+              <a:defRPr sz="1600">
+                <a:solidFill>
+                  <a:schemeClr val="tx1">
+                    <a:tint val="75000"/>
+                  </a:schemeClr>
+                </a:solidFill>
+              </a:defRPr>
+            </a:lvl7pPr>
+            <a:lvl8pPr marL="3200400" indent="0">
+              <a:buNone/>
+              <a:defRPr sz="1600">
+                <a:solidFill>
+                  <a:schemeClr val="tx1">
+                    <a:tint val="75000"/>
+                  </a:schemeClr>
+                </a:solidFill>
+              </a:defRPr>
+            </a:lvl8pPr>
+            <a:lvl9pPr marL="3657600" indent="0">
+              <a:buNone/>
+              <a:defRPr sz="1600">
+                <a:solidFill>
+                  <a:schemeClr val="tx1">
+                    <a:tint val="75000"/>
+                  </a:schemeClr>
+                </a:solidFill>
+              </a:defRPr>
+            </a:lvl9pPr>
+          </a:lstStyle>
+          <a:p>
+            <a:pPr lvl="0"/>
+            <a:r>
+              <a:rPr lang="en-US"/>
+              <a:t>Click to edit Master text styles</a:t>
+            </a:r>
+          </a:p>
+        </p:txBody>
+      </p:sp>
+    </p:spTree>
+    <p:extLst>
+      <p:ext uri="{BB962C8B-B14F-4D97-AF65-F5344CB8AC3E}">
+        <p14:creationId xmlns:p14="http://schemas.microsoft.com/office/powerpoint/2010/main" val="3547603299"/>
       </p:ext>
     </p:extLst>
   </p:cSld>
@@ -5485,7 +5182,7 @@
           <p:nvPr userDrawn="1"/>
         </p:nvPicPr>
         <p:blipFill>
-          <a:blip r:embed="rId4">
+          <a:blip r:embed="rId3">
             <a:extLst>
               <a:ext uri="{28A0092B-C50C-407E-A947-70E740481C1C}">
                 <a14:useLocalDpi xmlns:a14="http://schemas.microsoft.com/office/drawing/2010/main" val="0"/>
@@ -5524,7 +5221,7 @@
           <a:blip>
             <a:extLst>
               <a:ext uri="{96DAC541-7B7A-43D3-8B79-37D633B846F1}">
-                <asvg:svgBlip xmlns:asvg="http://schemas.microsoft.com/office/drawing/2016/SVG/main" r:embed="rId5"/>
+                <asvg:svgBlip xmlns:asvg="http://schemas.microsoft.com/office/drawing/2016/SVG/main" r:embed="rId4"/>
               </a:ext>
             </a:extLst>
           </a:blip>
@@ -5702,7 +5399,7 @@
           <p:nvPr userDrawn="1"/>
         </p:nvPicPr>
         <p:blipFill>
-          <a:blip r:embed="rId6">
+          <a:blip r:embed="rId5">
             <a:extLst>
               <a:ext uri="{28A0092B-C50C-407E-A947-70E740481C1C}">
                 <a14:useLocalDpi xmlns:a14="http://schemas.microsoft.com/office/drawing/2010/main" val="0"/>
@@ -5741,7 +5438,7 @@
           <a:blip>
             <a:extLst>
               <a:ext uri="{96DAC541-7B7A-43D3-8B79-37D633B846F1}">
-                <asvg:svgBlip xmlns:asvg="http://schemas.microsoft.com/office/drawing/2016/SVG/main" r:embed="rId7"/>
+                <asvg:svgBlip xmlns:asvg="http://schemas.microsoft.com/office/drawing/2016/SVG/main" r:embed="rId6"/>
               </a:ext>
             </a:extLst>
           </a:blip>
@@ -5774,11 +5471,11 @@
           <p:nvPr userDrawn="1"/>
         </p:nvPicPr>
         <p:blipFill>
-          <a:blip r:embed="rId8">
+          <a:blip r:embed="rId7">
             <a:extLst>
               <a:ext uri="{BEBA8EAE-BF5A-486C-A8C5-ECC9F3942E4B}">
                 <a14:imgProps xmlns:a14="http://schemas.microsoft.com/office/drawing/2010/main">
-                  <a14:imgLayer r:embed="rId9">
+                  <a14:imgLayer r:embed="rId8">
                     <a14:imgEffect>
                       <a14:colorTemperature colorTemp="11500"/>
                     </a14:imgEffect>
@@ -5825,7 +5522,7 @@
           <p:nvPr userDrawn="1"/>
         </p:nvPicPr>
         <p:blipFill>
-          <a:blip r:embed="rId10">
+          <a:blip r:embed="rId9">
             <a:extLst>
               <a:ext uri="{28A0092B-C50C-407E-A947-70E740481C1C}">
                 <a14:useLocalDpi xmlns:a14="http://schemas.microsoft.com/office/drawing/2010/main" val="0"/>
@@ -5856,7 +5553,6 @@
   <p:clrMap bg1="lt1" tx1="dk1" bg2="lt2" tx2="dk2" accent1="accent1" accent2="accent2" accent3="accent3" accent4="accent4" accent5="accent5" accent6="accent6" hlink="hlink" folHlink="folHlink"/>
   <p:sldLayoutIdLst>
     <p:sldLayoutId id="2147483696" r:id="rId1"/>
-    <p:sldLayoutId id="2147483706" r:id="rId2"/>
   </p:sldLayoutIdLst>
   <p:txStyles>
     <p:titleStyle>
@@ -12867,7 +12563,7 @@
           <a:p>
             <a:r>
               <a:rPr lang="en-US" dirty="0"/>
-              <a:t>Version Targeting Considerations</a:t>
+              <a:t>Just target .NET Standard 2.0</a:t>
             </a:r>
           </a:p>
         </p:txBody>
@@ -12898,40 +12594,12 @@
           <a:bodyPr/>
           <a:lstStyle/>
           <a:p>
+            <a:pPr marL="0" indent="0">
+              <a:buNone/>
+            </a:pPr>
             <a:r>
               <a:rPr lang="en-US" dirty="0"/>
-              <a:t>Pwsh 7.6+ / .NET 10+ if yes to any </a:t>
-            </a:r>
-            <a:r>
-              <a:rPr lang="en-US" dirty="0">
-                <a:solidFill>
-                  <a:schemeClr val="bg2">
-                    <a:lumMod val="75000"/>
-                  </a:schemeClr>
-                </a:solidFill>
-              </a:rPr>
-              <a:t>(or at least 7.4)</a:t>
-            </a:r>
-          </a:p>
-          <a:p>
-            <a:pPr lvl="1"/>
-            <a:r>
-              <a:rPr lang="en-US" dirty="0"/>
-              <a:t>Need for Assembly Load Context?</a:t>
-            </a:r>
-          </a:p>
-          <a:p>
-            <a:pPr lvl="1"/>
-            <a:r>
-              <a:rPr lang="en-US" dirty="0"/>
-              <a:t>Need for newer .NET APIs?</a:t>
-            </a:r>
-          </a:p>
-          <a:p>
-            <a:pPr lvl="1"/>
-            <a:r>
-              <a:rPr lang="en-US" dirty="0"/>
-              <a:t>Dependencies only support newer .NET?</a:t>
+              <a:t>Unless you need new .NET APIs</a:t>
             </a:r>
           </a:p>
         </p:txBody>
@@ -14708,10 +14376,10 @@
       </p:cxnSp>
       <p:sp>
         <p:nvSpPr>
-          <p:cNvPr id="8" name="Title 1">
+          <p:cNvPr id="6" name="Title 1">
             <a:extLst>
               <a:ext uri="{FF2B5EF4-FFF2-40B4-BE49-F238E27FC236}">
-                <a16:creationId xmlns:a16="http://schemas.microsoft.com/office/drawing/2014/main" id="{911463E5-1CAC-9711-169B-4CF29F65FCBD}"/>
+                <a16:creationId xmlns:a16="http://schemas.microsoft.com/office/drawing/2014/main" id="{2447CCC6-CB5F-08A4-2B7D-7ACDA72F2E13}"/>
               </a:ext>
             </a:extLst>
           </p:cNvPr>
@@ -14749,13 +14417,13 @@
   <p:clrMapOvr>
     <a:masterClrMapping/>
   </p:clrMapOvr>
-  <mc:AlternateContent xmlns:mc="http://schemas.openxmlformats.org/markup-compatibility/2006">
-    <mc:Choice xmlns:p159="http://schemas.microsoft.com/office/powerpoint/2015/09/main" Requires="p159">
+  <mc:AlternateContent xmlns:mc="http://schemas.openxmlformats.org/markup-compatibility/2006" xmlns:p159="http://schemas.microsoft.com/office/powerpoint/2015/09/main">
+    <mc:Choice Requires="p159">
       <p:transition xmlns:p14="http://schemas.microsoft.com/office/powerpoint/2010/main" spd="med" p14:dur="700">
         <p159:morph option="byChar"/>
       </p:transition>
     </mc:Choice>
-    <mc:Fallback>
+    <mc:Fallback xmlns="">
       <p:transition spd="med">
         <p:fade/>
       </p:transition>
@@ -16619,13 +16287,13 @@
   <p:clrMapOvr>
     <a:masterClrMapping/>
   </p:clrMapOvr>
-  <mc:AlternateContent xmlns:mc="http://schemas.openxmlformats.org/markup-compatibility/2006">
-    <mc:Choice xmlns:p159="http://schemas.microsoft.com/office/powerpoint/2015/09/main" Requires="p159">
+  <mc:AlternateContent xmlns:mc="http://schemas.openxmlformats.org/markup-compatibility/2006" xmlns:p159="http://schemas.microsoft.com/office/powerpoint/2015/09/main">
+    <mc:Choice Requires="p159">
       <p:transition xmlns:p14="http://schemas.microsoft.com/office/powerpoint/2010/main" spd="med" p14:dur="700">
         <p159:morph option="byChar"/>
       </p:transition>
     </mc:Choice>
-    <mc:Fallback>
+    <mc:Fallback xmlns="">
       <p:transition spd="med">
         <p:fade/>
       </p:transition>
@@ -19746,13 +19414,13 @@
   <p:clrMapOvr>
     <a:masterClrMapping/>
   </p:clrMapOvr>
-  <mc:AlternateContent xmlns:mc="http://schemas.openxmlformats.org/markup-compatibility/2006">
-    <mc:Choice xmlns:p159="http://schemas.microsoft.com/office/powerpoint/2015/09/main" Requires="p159">
+  <mc:AlternateContent xmlns:mc="http://schemas.openxmlformats.org/markup-compatibility/2006" xmlns:p159="http://schemas.microsoft.com/office/powerpoint/2015/09/main">
+    <mc:Choice Requires="p159">
       <p:transition xmlns:p14="http://schemas.microsoft.com/office/powerpoint/2010/main" spd="med" p14:dur="700">
         <p159:morph option="byChar"/>
       </p:transition>
     </mc:Choice>
-    <mc:Fallback>
+    <mc:Fallback xmlns="">
       <p:transition spd="med">
         <p:fade/>
       </p:transition>
@@ -22837,13 +22505,13 @@
   <p:clrMapOvr>
     <a:masterClrMapping/>
   </p:clrMapOvr>
-  <mc:AlternateContent xmlns:mc="http://schemas.openxmlformats.org/markup-compatibility/2006">
-    <mc:Choice xmlns:p159="http://schemas.microsoft.com/office/powerpoint/2015/09/main" Requires="p159">
+  <mc:AlternateContent xmlns:mc="http://schemas.openxmlformats.org/markup-compatibility/2006" xmlns:p159="http://schemas.microsoft.com/office/powerpoint/2015/09/main">
+    <mc:Choice Requires="p159">
       <p:transition xmlns:p14="http://schemas.microsoft.com/office/powerpoint/2010/main" spd="med" p14:dur="700">
         <p159:morph option="byChar"/>
       </p:transition>
     </mc:Choice>
-    <mc:Fallback>
+    <mc:Fallback xmlns="">
       <p:transition spd="med">
         <p:fade/>
       </p:transition>
@@ -22927,7 +22595,7 @@
           <a:p>
             <a:r>
               <a:rPr lang="en-US" sz="3400" dirty="0"/>
-              <a:t>A module for Messaging with SDK </a:t>
+              <a:t>A messaging module with SDK </a:t>
             </a:r>
             <a:r>
               <a:rPr lang="en-US" sz="3400" dirty="0" err="1"/>
@@ -22962,10 +22630,16 @@
               <a:t>… in 30~ish minutes?</a:t>
             </a:r>
           </a:p>
+          <a:p>
+            <a:r>
+              <a:rPr lang="en-US" sz="3400" dirty="0"/>
+              <a:t>… after some prep</a:t>
+            </a:r>
+          </a:p>
         </p:txBody>
       </p:sp>
-      <mc:AlternateContent xmlns:mc="http://schemas.openxmlformats.org/markup-compatibility/2006">
-        <mc:Choice xmlns:p14="http://schemas.microsoft.com/office/powerpoint/2010/main" Requires="p14">
+      <mc:AlternateContent xmlns:mc="http://schemas.openxmlformats.org/markup-compatibility/2006" xmlns:p14="http://schemas.microsoft.com/office/powerpoint/2010/main">
+        <mc:Choice Requires="p14">
           <p:contentPart p14:bwMode="auto" r:id="rId2">
             <p14:nvContentPartPr>
               <p14:cNvPr id="78" name="Ink 77">
@@ -22984,7 +22658,7 @@
             </p14:xfrm>
           </p:contentPart>
         </mc:Choice>
-        <mc:Fallback>
+        <mc:Fallback xmlns="">
           <p:pic>
             <p:nvPicPr>
               <p:cNvPr id="78" name="Ink 77">
@@ -23406,6 +23080,67 @@
                       </p:childTnLst>
                     </p:cTn>
                   </p:par>
+                  <p:par>
+                    <p:cTn id="33" fill="hold">
+                      <p:stCondLst>
+                        <p:cond delay="indefinite"/>
+                      </p:stCondLst>
+                      <p:childTnLst>
+                        <p:par>
+                          <p:cTn id="34" fill="hold">
+                            <p:stCondLst>
+                              <p:cond delay="0"/>
+                            </p:stCondLst>
+                            <p:childTnLst>
+                              <p:par>
+                                <p:cTn id="35" presetID="10" presetClass="entr" presetSubtype="0" fill="hold" grpId="0" nodeType="clickEffect">
+                                  <p:stCondLst>
+                                    <p:cond delay="0"/>
+                                  </p:stCondLst>
+                                  <p:childTnLst>
+                                    <p:set>
+                                      <p:cBhvr>
+                                        <p:cTn id="36" dur="1" fill="hold">
+                                          <p:stCondLst>
+                                            <p:cond delay="0"/>
+                                          </p:stCondLst>
+                                        </p:cTn>
+                                        <p:tgtEl>
+                                          <p:spTgt spid="3">
+                                            <p:txEl>
+                                              <p:pRg st="5" end="5"/>
+                                            </p:txEl>
+                                          </p:spTgt>
+                                        </p:tgtEl>
+                                        <p:attrNameLst>
+                                          <p:attrName>style.visibility</p:attrName>
+                                        </p:attrNameLst>
+                                      </p:cBhvr>
+                                      <p:to>
+                                        <p:strVal val="visible"/>
+                                      </p:to>
+                                    </p:set>
+                                    <p:animEffect transition="in" filter="fade">
+                                      <p:cBhvr>
+                                        <p:cTn id="37" dur="500"/>
+                                        <p:tgtEl>
+                                          <p:spTgt spid="3">
+                                            <p:txEl>
+                                              <p:pRg st="5" end="5"/>
+                                            </p:txEl>
+                                          </p:spTgt>
+                                        </p:tgtEl>
+                                      </p:cBhvr>
+                                    </p:animEffect>
+                                  </p:childTnLst>
+                                </p:cTn>
+                              </p:par>
+                            </p:childTnLst>
+                          </p:cTn>
+                        </p:par>
+                      </p:childTnLst>
+                    </p:cTn>
+                  </p:par>
                 </p:childTnLst>
               </p:cTn>
               <p:prevCondLst>
@@ -23442,7 +23177,7 @@
         <p:cNvPr id="1" name="">
           <a:extLst>
             <a:ext uri="{FF2B5EF4-FFF2-40B4-BE49-F238E27FC236}">
-              <a16:creationId xmlns:a16="http://schemas.microsoft.com/office/drawing/2014/main" id="{B8ED64CF-57D8-CF0B-F466-19A141323B26}"/>
+              <a16:creationId xmlns:a16="http://schemas.microsoft.com/office/drawing/2014/main" id="{09D7DBF2-C3FD-3AFE-10B0-2CB992D3A1D0}"/>
             </a:ext>
           </a:extLst>
         </p:cNvPr>
@@ -23457,65 +23192,12 @@
           <a:chExt cx="0" cy="0"/>
         </a:xfrm>
       </p:grpSpPr>
-      <p:sp>
-        <p:nvSpPr>
-          <p:cNvPr id="5" name="Title 1">
+      <p:pic>
+        <p:nvPicPr>
+          <p:cNvPr id="5" name="Picture 4">
             <a:extLst>
               <a:ext uri="{FF2B5EF4-FFF2-40B4-BE49-F238E27FC236}">
-                <a16:creationId xmlns:a16="http://schemas.microsoft.com/office/drawing/2014/main" id="{735506B3-41AE-4B24-877E-BCB8667526FC}"/>
-              </a:ext>
-            </a:extLst>
-          </p:cNvPr>
-          <p:cNvSpPr txBox="1">
-            <a:spLocks/>
-          </p:cNvSpPr>
-          <p:nvPr/>
-        </p:nvSpPr>
-        <p:spPr>
-          <a:xfrm>
-            <a:off x="838199" y="365125"/>
-            <a:ext cx="10873509" cy="1325563"/>
-          </a:xfrm>
-        </p:spPr>
-        <p:txBody>
-          <a:bodyPr>
-            <a:normAutofit/>
-          </a:bodyPr>
-          <a:lstStyle>
-            <a:lvl1pPr algn="l" defTabSz="914400" rtl="0" eaLnBrk="1" latinLnBrk="0" hangingPunct="1">
-              <a:lnSpc>
-                <a:spcPct val="90000"/>
-              </a:lnSpc>
-              <a:spcBef>
-                <a:spcPct val="0"/>
-              </a:spcBef>
-              <a:buNone/>
-              <a:defRPr lang="en-GB" sz="5400" b="1" kern="1200" dirty="0">
-                <a:solidFill>
-                  <a:srgbClr val="3B2B46"/>
-                </a:solidFill>
-                <a:latin typeface="+mj-lt"/>
-                <a:ea typeface="+mj-ea"/>
-                <a:cs typeface="+mj-cs"/>
-              </a:defRPr>
-            </a:lvl1pPr>
-          </a:lstStyle>
-          <a:p>
-            <a:r>
-              <a:rPr lang="en-US" sz="3600" dirty="0">
-                <a:latin typeface="+mn-lt"/>
-              </a:rPr>
-              <a:t>Demo! C# Module for Azure Storage Queues</a:t>
-            </a:r>
-          </a:p>
-        </p:txBody>
-      </p:sp>
-      <p:pic>
-        <p:nvPicPr>
-          <p:cNvPr id="3" name="Picture 2">
-            <a:extLst>
-              <a:ext uri="{FF2B5EF4-FFF2-40B4-BE49-F238E27FC236}">
-                <a16:creationId xmlns:a16="http://schemas.microsoft.com/office/drawing/2014/main" id="{D3E9E773-AE78-F595-5A4A-3252A0F94FD3}"/>
+                <a16:creationId xmlns:a16="http://schemas.microsoft.com/office/drawing/2014/main" id="{18CE1493-6A1F-6E0B-4A67-EEBEC597917F}"/>
               </a:ext>
             </a:extLst>
           </p:cNvPr>
@@ -23525,7 +23207,7 @@
           <p:nvPr/>
         </p:nvPicPr>
         <p:blipFill>
-          <a:blip r:embed="rId3">
+          <a:blip r:embed="rId2">
             <a:extLst>
               <a:ext uri="{28A0092B-C50C-407E-A947-70E740481C1C}">
                 <a14:useLocalDpi xmlns:a14="http://schemas.microsoft.com/office/drawing/2010/main" val="0"/>
@@ -23538,56 +23220,20 @@
         </p:blipFill>
         <p:spPr>
           <a:xfrm>
-            <a:off x="3509384" y="988291"/>
-            <a:ext cx="5173232" cy="5173230"/>
+            <a:off x="6641169" y="430993"/>
+            <a:ext cx="4118677" cy="4118675"/>
           </a:xfrm>
           <a:prstGeom prst="rect">
             <a:avLst/>
           </a:prstGeom>
         </p:spPr>
       </p:pic>
-    </p:spTree>
-    <p:extLst>
-      <p:ext uri="{BB962C8B-B14F-4D97-AF65-F5344CB8AC3E}">
-        <p14:creationId xmlns:p14="http://schemas.microsoft.com/office/powerpoint/2010/main" val="126956374"/>
-      </p:ext>
-    </p:extLst>
-  </p:cSld>
-  <p:clrMapOvr>
-    <a:masterClrMapping/>
-  </p:clrMapOvr>
-</p:sld>
-</file>
-
-<file path=ppt/slides/slide24.xml><?xml version="1.0" encoding="utf-8"?>
-<p:sld xmlns:a="http://schemas.openxmlformats.org/drawingml/2006/main" xmlns:r="http://schemas.openxmlformats.org/officeDocument/2006/relationships" xmlns:p="http://schemas.openxmlformats.org/presentationml/2006/main">
-  <p:cSld>
-    <p:spTree>
-      <p:nvGrpSpPr>
-        <p:cNvPr id="1" name="">
-          <a:extLst>
-            <a:ext uri="{FF2B5EF4-FFF2-40B4-BE49-F238E27FC236}">
-              <a16:creationId xmlns:a16="http://schemas.microsoft.com/office/drawing/2014/main" id="{6D4911F7-DC84-24C7-1977-6FC6CC8E9E94}"/>
-            </a:ext>
-          </a:extLst>
-        </p:cNvPr>
-        <p:cNvGrpSpPr/>
-        <p:nvPr/>
-      </p:nvGrpSpPr>
-      <p:grpSpPr>
-        <a:xfrm>
-          <a:off x="0" y="0"/>
-          <a:ext cx="0" cy="0"/>
-          <a:chOff x="0" y="0"/>
-          <a:chExt cx="0" cy="0"/>
-        </a:xfrm>
-      </p:grpSpPr>
       <p:sp>
         <p:nvSpPr>
           <p:cNvPr id="2" name="Title 1">
             <a:extLst>
               <a:ext uri="{FF2B5EF4-FFF2-40B4-BE49-F238E27FC236}">
-                <a16:creationId xmlns:a16="http://schemas.microsoft.com/office/drawing/2014/main" id="{F167402C-BF63-D1B3-9A63-60BD1A8DB4A8}"/>
+                <a16:creationId xmlns:a16="http://schemas.microsoft.com/office/drawing/2014/main" id="{F04DE705-8C13-B27E-C87A-0B3B33118C94}"/>
               </a:ext>
             </a:extLst>
           </p:cNvPr>
@@ -23600,13 +23246,31 @@
         </p:nvSpPr>
         <p:spPr/>
         <p:txBody>
-          <a:bodyPr/>
+          <a:bodyPr>
+            <a:normAutofit/>
+          </a:bodyPr>
           <a:lstStyle/>
           <a:p>
             <a:r>
               <a:rPr lang="en-US" dirty="0"/>
-              <a:t>Takeaways</a:t>
-            </a:r>
+              <a:t>Demo time!</a:t>
+            </a:r>
+            <a:br>
+              <a:rPr lang="en-US" dirty="0"/>
+            </a:br>
+            <a:r>
+              <a:rPr lang="en-US" sz="2800" dirty="0">
+                <a:solidFill>
+                  <a:srgbClr val="336297"/>
+                </a:solidFill>
+              </a:rPr>
+              <a:t>The demo setup has already...</a:t>
+            </a:r>
+            <a:endParaRPr lang="en-US" dirty="0">
+              <a:solidFill>
+                <a:srgbClr val="336297"/>
+              </a:solidFill>
+            </a:endParaRPr>
           </a:p>
         </p:txBody>
       </p:sp>
@@ -23615,7 +23279,7 @@
           <p:cNvPr id="3" name="Content Placeholder 2">
             <a:extLst>
               <a:ext uri="{FF2B5EF4-FFF2-40B4-BE49-F238E27FC236}">
-                <a16:creationId xmlns:a16="http://schemas.microsoft.com/office/drawing/2014/main" id="{9724C6E8-837F-4FC7-E079-58C8EC0CD8F0}"/>
+                <a16:creationId xmlns:a16="http://schemas.microsoft.com/office/drawing/2014/main" id="{ED65727E-AFEF-AC5C-997E-E63C1ECAD6A7}"/>
               </a:ext>
             </a:extLst>
           </p:cNvPr>
@@ -23638,35 +23302,835 @@
           </a:bodyPr>
           <a:lstStyle/>
           <a:p>
-            <a:r>
-              <a:rPr lang="en-US" sz="4400" dirty="0"/>
-              <a:t>Taking advantage of the .NET ecosystem 📦</a:t>
-            </a:r>
-          </a:p>
-          <a:p>
-            <a:endParaRPr lang="en-US" sz="4400" dirty="0"/>
-          </a:p>
-          <a:p>
-            <a:r>
-              <a:rPr lang="en-US" sz="4400" dirty="0"/>
-              <a:t>Utilizing community tools 🛠️</a:t>
-            </a:r>
-          </a:p>
-          <a:p>
-            <a:endParaRPr lang="en-US" sz="4400" dirty="0"/>
-          </a:p>
-          <a:p>
-            <a:r>
-              <a:rPr lang="en-US" sz="4400" dirty="0"/>
-              <a:t>Building modules Open Source 📖</a:t>
-            </a:r>
+            <a:pPr marL="514350" indent="-514350">
+              <a:buFont typeface="+mj-lt"/>
+              <a:buAutoNum type="arabicPeriod"/>
+            </a:pPr>
+            <a:r>
+              <a:rPr lang="en-US" sz="3400" dirty="0"/>
+              <a:t>… executed </a:t>
+            </a:r>
+            <a:r>
+              <a:rPr lang="en-US" sz="2800" dirty="0">
+                <a:latin typeface="Cascadia Code" panose="020B0609020000020004" pitchFamily="34" charset="0"/>
+                <a:ea typeface="Cascadia Code" panose="020B0609020000020004" pitchFamily="34" charset="0"/>
+                <a:cs typeface="Cascadia Code" panose="020B0609020000020004" pitchFamily="34" charset="0"/>
+              </a:rPr>
+              <a:t>New-</a:t>
+            </a:r>
+            <a:r>
+              <a:rPr lang="en-US" sz="2800" dirty="0" err="1">
+                <a:latin typeface="Cascadia Code" panose="020B0609020000020004" pitchFamily="34" charset="0"/>
+                <a:ea typeface="Cascadia Code" panose="020B0609020000020004" pitchFamily="34" charset="0"/>
+                <a:cs typeface="Cascadia Code" panose="020B0609020000020004" pitchFamily="34" charset="0"/>
+              </a:rPr>
+              <a:t>SampleModule</a:t>
+            </a:r>
+            <a:endParaRPr lang="en-US" sz="3400" dirty="0">
+              <a:latin typeface="Cascadia Code" panose="020B0609020000020004" pitchFamily="34" charset="0"/>
+              <a:ea typeface="Cascadia Code" panose="020B0609020000020004" pitchFamily="34" charset="0"/>
+              <a:cs typeface="Cascadia Code" panose="020B0609020000020004" pitchFamily="34" charset="0"/>
+            </a:endParaRPr>
+          </a:p>
+          <a:p>
+            <a:pPr marL="514350" indent="-514350">
+              <a:buFont typeface="+mj-lt"/>
+              <a:buAutoNum type="arabicPeriod"/>
+            </a:pPr>
+            <a:r>
+              <a:rPr lang="en-US" sz="3400" dirty="0"/>
+              <a:t>… removed some files</a:t>
+            </a:r>
+          </a:p>
+          <a:p>
+            <a:pPr marL="514350" indent="-514350">
+              <a:buFont typeface="+mj-lt"/>
+              <a:buAutoNum type="arabicPeriod"/>
+            </a:pPr>
+            <a:r>
+              <a:rPr lang="en-US" sz="3400" dirty="0"/>
+              <a:t>… added some files</a:t>
+            </a:r>
+          </a:p>
+          <a:p>
+            <a:pPr lvl="1"/>
+            <a:r>
+              <a:rPr lang="en-US" sz="3000" dirty="0" err="1"/>
+              <a:t>InvokeBuild</a:t>
+            </a:r>
+            <a:r>
+              <a:rPr lang="en-US" sz="3000" dirty="0"/>
+              <a:t> Task</a:t>
+            </a:r>
+          </a:p>
+          <a:p>
+            <a:pPr lvl="2"/>
+            <a:r>
+              <a:rPr lang="en-US" sz="2600" dirty="0"/>
+              <a:t>.NET compilation</a:t>
+            </a:r>
+          </a:p>
+          <a:p>
+            <a:pPr lvl="1"/>
+            <a:r>
+              <a:rPr lang="en-US" sz="3000" dirty="0" err="1"/>
+              <a:t>GitVersion</a:t>
+            </a:r>
+            <a:r>
+              <a:rPr lang="en-US" sz="3000" dirty="0"/>
+              <a:t> config</a:t>
+            </a:r>
+          </a:p>
+          <a:p>
+            <a:pPr lvl="1"/>
+            <a:r>
+              <a:rPr lang="en-US" sz="3000" dirty="0"/>
+              <a:t>GitHub Workflow</a:t>
+            </a:r>
+          </a:p>
+          <a:p>
+            <a:pPr marL="514350" indent="-514350">
+              <a:buFont typeface="+mj-lt"/>
+              <a:buAutoNum type="arabicPeriod"/>
+            </a:pPr>
+            <a:r>
+              <a:rPr lang="en-US" sz="3400" dirty="0"/>
+              <a:t>… created an Azure Storage Queue</a:t>
+            </a:r>
+          </a:p>
+          <a:p>
+            <a:pPr marL="971550" lvl="1" indent="-514350">
+              <a:buFont typeface="+mj-lt"/>
+              <a:buAutoNum type="arabicPeriod"/>
+            </a:pPr>
+            <a:endParaRPr lang="en-US" sz="3400" dirty="0"/>
           </a:p>
         </p:txBody>
       </p:sp>
+      <p:grpSp>
+        <p:nvGrpSpPr>
+          <p:cNvPr id="7" name="Group 6">
+            <a:extLst>
+              <a:ext uri="{FF2B5EF4-FFF2-40B4-BE49-F238E27FC236}">
+                <a16:creationId xmlns:a16="http://schemas.microsoft.com/office/drawing/2014/main" id="{68597732-0DAF-5C2B-1676-89B15D41FCFF}"/>
+              </a:ext>
+            </a:extLst>
+          </p:cNvPr>
+          <p:cNvGrpSpPr/>
+          <p:nvPr/>
+        </p:nvGrpSpPr>
+        <p:grpSpPr>
+          <a:xfrm>
+            <a:off x="440148" y="1825625"/>
+            <a:ext cx="11311704" cy="4118675"/>
+            <a:chOff x="480292" y="2020591"/>
+            <a:chExt cx="11311704" cy="4118675"/>
+          </a:xfrm>
+        </p:grpSpPr>
+        <p:sp>
+          <p:nvSpPr>
+            <p:cNvPr id="4" name="Rectangle 3">
+              <a:extLst>
+                <a:ext uri="{FF2B5EF4-FFF2-40B4-BE49-F238E27FC236}">
+                  <a16:creationId xmlns:a16="http://schemas.microsoft.com/office/drawing/2014/main" id="{74DFD0F6-492E-0DC4-2117-A48C7DCE1378}"/>
+                </a:ext>
+              </a:extLst>
+            </p:cNvPr>
+            <p:cNvSpPr/>
+            <p:nvPr/>
+          </p:nvSpPr>
+          <p:spPr>
+            <a:xfrm>
+              <a:off x="480292" y="2020591"/>
+              <a:ext cx="11311704" cy="4118675"/>
+            </a:xfrm>
+            <a:prstGeom prst="rect">
+              <a:avLst/>
+            </a:prstGeom>
+            <a:solidFill>
+              <a:srgbClr val="191919"/>
+            </a:solidFill>
+          </p:spPr>
+          <p:style>
+            <a:lnRef idx="2">
+              <a:schemeClr val="accent1">
+                <a:shade val="15000"/>
+              </a:schemeClr>
+            </a:lnRef>
+            <a:fillRef idx="1">
+              <a:schemeClr val="accent1"/>
+            </a:fillRef>
+            <a:effectRef idx="0">
+              <a:schemeClr val="accent1"/>
+            </a:effectRef>
+            <a:fontRef idx="minor">
+              <a:schemeClr val="lt1"/>
+            </a:fontRef>
+          </p:style>
+          <p:txBody>
+            <a:bodyPr rtlCol="0" anchor="ctr"/>
+            <a:lstStyle/>
+            <a:p>
+              <a:pPr marL="0" marR="0" lvl="0" indent="0" algn="ctr" defTabSz="914400" rtl="0" eaLnBrk="1" fontAlgn="auto" latinLnBrk="0" hangingPunct="1">
+                <a:lnSpc>
+                  <a:spcPct val="100000"/>
+                </a:lnSpc>
+                <a:spcBef>
+                  <a:spcPts val="0"/>
+                </a:spcBef>
+                <a:spcAft>
+                  <a:spcPts val="0"/>
+                </a:spcAft>
+                <a:buClrTx/>
+                <a:buSzTx/>
+                <a:buFontTx/>
+                <a:buNone/>
+                <a:tabLst/>
+                <a:defRPr/>
+              </a:pPr>
+              <a:endParaRPr kumimoji="0" lang="en-US" sz="1800" b="0" i="0" u="none" strike="noStrike" kern="1200" cap="none" spc="0" normalizeH="0" baseline="0" noProof="0">
+                <a:ln>
+                  <a:noFill/>
+                </a:ln>
+                <a:solidFill>
+                  <a:prstClr val="white"/>
+                </a:solidFill>
+                <a:effectLst/>
+                <a:uLnTx/>
+                <a:uFillTx/>
+                <a:latin typeface="Calibri" panose="020F0502020204030204"/>
+                <a:ea typeface="+mn-ea"/>
+                <a:cs typeface="+mn-cs"/>
+              </a:endParaRPr>
+            </a:p>
+          </p:txBody>
+        </p:sp>
+        <p:sp>
+          <p:nvSpPr>
+            <p:cNvPr id="6" name="TextBox 5">
+              <a:extLst>
+                <a:ext uri="{FF2B5EF4-FFF2-40B4-BE49-F238E27FC236}">
+                  <a16:creationId xmlns:a16="http://schemas.microsoft.com/office/drawing/2014/main" id="{3138BAD8-27C6-9E7A-98FE-1F07EA8E3D50}"/>
+                </a:ext>
+              </a:extLst>
+            </p:cNvPr>
+            <p:cNvSpPr txBox="1"/>
+            <p:nvPr/>
+          </p:nvSpPr>
+          <p:spPr>
+            <a:xfrm>
+              <a:off x="616980" y="2186255"/>
+              <a:ext cx="11022247" cy="3785652"/>
+            </a:xfrm>
+            <a:prstGeom prst="rect">
+              <a:avLst/>
+            </a:prstGeom>
+            <a:noFill/>
+          </p:spPr>
+          <p:txBody>
+            <a:bodyPr wrap="square">
+              <a:spAutoFit/>
+            </a:bodyPr>
+            <a:lstStyle/>
+            <a:p>
+              <a:pPr>
+                <a:buNone/>
+              </a:pPr>
+              <a:r>
+                <a:rPr lang="en-US" sz="2000" b="0" dirty="0">
+                  <a:solidFill>
+                    <a:srgbClr val="9CDCFE"/>
+                  </a:solidFill>
+                  <a:effectLst/>
+                  <a:latin typeface="Cascadia Code" panose="020B0609020000020004" pitchFamily="34" charset="0"/>
+                </a:rPr>
+                <a:t>$</a:t>
+              </a:r>
+              <a:r>
+                <a:rPr lang="en-US" sz="2000" b="0" dirty="0" err="1">
+                  <a:solidFill>
+                    <a:srgbClr val="9CDCFE"/>
+                  </a:solidFill>
+                  <a:effectLst/>
+                  <a:latin typeface="Cascadia Code" panose="020B0609020000020004" pitchFamily="34" charset="0"/>
+                </a:rPr>
+                <a:t>ModuleSplat</a:t>
+              </a:r>
+              <a:r>
+                <a:rPr lang="en-US" sz="2000" b="0" dirty="0">
+                  <a:solidFill>
+                    <a:srgbClr val="D4D4D4"/>
+                  </a:solidFill>
+                  <a:effectLst/>
+                  <a:latin typeface="Cascadia Code" panose="020B0609020000020004" pitchFamily="34" charset="0"/>
+                </a:rPr>
+                <a:t> = </a:t>
+              </a:r>
+              <a:r>
+                <a:rPr lang="en-US" sz="2000" b="0" dirty="0">
+                  <a:solidFill>
+                    <a:srgbClr val="569CD6"/>
+                  </a:solidFill>
+                  <a:effectLst/>
+                  <a:latin typeface="Cascadia Code" panose="020B0609020000020004" pitchFamily="34" charset="0"/>
+                </a:rPr>
+                <a:t>@</a:t>
+              </a:r>
+              <a:r>
+                <a:rPr lang="en-US" sz="2000" b="0" dirty="0">
+                  <a:solidFill>
+                    <a:srgbClr val="D4D4D4"/>
+                  </a:solidFill>
+                  <a:effectLst/>
+                  <a:latin typeface="Cascadia Code" panose="020B0609020000020004" pitchFamily="34" charset="0"/>
+                </a:rPr>
+                <a:t>{</a:t>
+              </a:r>
+              <a:endParaRPr lang="en-US" sz="2000" b="0" dirty="0">
+                <a:solidFill>
+                  <a:srgbClr val="CCCCCC"/>
+                </a:solidFill>
+                <a:effectLst/>
+                <a:latin typeface="Cascadia Code" panose="020B0609020000020004" pitchFamily="34" charset="0"/>
+              </a:endParaRPr>
+            </a:p>
+            <a:p>
+              <a:pPr>
+                <a:buNone/>
+              </a:pPr>
+              <a:r>
+                <a:rPr lang="en-US" sz="2000" dirty="0">
+                  <a:solidFill>
+                    <a:srgbClr val="9CDCFE"/>
+                  </a:solidFill>
+                  <a:latin typeface="Cascadia Code" panose="020B0609020000020004" pitchFamily="34" charset="0"/>
+                </a:rPr>
+                <a:t>    </a:t>
+              </a:r>
+              <a:r>
+                <a:rPr lang="en-US" sz="2000" b="0" dirty="0" err="1">
+                  <a:solidFill>
+                    <a:srgbClr val="9CDCFE"/>
+                  </a:solidFill>
+                  <a:effectLst/>
+                  <a:latin typeface="Cascadia Code" panose="020B0609020000020004" pitchFamily="34" charset="0"/>
+                </a:rPr>
+                <a:t>ModuleName</a:t>
+              </a:r>
+              <a:r>
+                <a:rPr lang="en-US" sz="2000" b="0" dirty="0">
+                  <a:solidFill>
+                    <a:srgbClr val="D4D4D4"/>
+                  </a:solidFill>
+                  <a:effectLst/>
+                  <a:latin typeface="Cascadia Code" panose="020B0609020000020004" pitchFamily="34" charset="0"/>
+                </a:rPr>
+                <a:t> = </a:t>
+              </a:r>
+              <a:r>
+                <a:rPr lang="en-US" sz="2000" b="0" dirty="0">
+                  <a:solidFill>
+                    <a:srgbClr val="CE9178"/>
+                  </a:solidFill>
+                  <a:effectLst/>
+                  <a:latin typeface="Cascadia Code" panose="020B0609020000020004" pitchFamily="34" charset="0"/>
+                </a:rPr>
+                <a:t>'</a:t>
+              </a:r>
+              <a:r>
+                <a:rPr lang="en-US" sz="2000" b="0" dirty="0" err="1">
+                  <a:solidFill>
+                    <a:srgbClr val="CE9178"/>
+                  </a:solidFill>
+                  <a:effectLst/>
+                  <a:latin typeface="Cascadia Code" panose="020B0609020000020004" pitchFamily="34" charset="0"/>
+                </a:rPr>
+                <a:t>AzPigeon</a:t>
+              </a:r>
+              <a:r>
+                <a:rPr lang="en-US" sz="2000" b="0" dirty="0">
+                  <a:solidFill>
+                    <a:srgbClr val="CE9178"/>
+                  </a:solidFill>
+                  <a:effectLst/>
+                  <a:latin typeface="Cascadia Code" panose="020B0609020000020004" pitchFamily="34" charset="0"/>
+                </a:rPr>
+                <a:t>’</a:t>
+              </a:r>
+              <a:endParaRPr lang="en-US" sz="2000" b="0" dirty="0">
+                <a:solidFill>
+                  <a:srgbClr val="CCCCCC"/>
+                </a:solidFill>
+                <a:effectLst/>
+                <a:latin typeface="Cascadia Code" panose="020B0609020000020004" pitchFamily="34" charset="0"/>
+              </a:endParaRPr>
+            </a:p>
+            <a:p>
+              <a:pPr>
+                <a:buNone/>
+              </a:pPr>
+              <a:r>
+                <a:rPr lang="en-US" sz="2000" dirty="0">
+                  <a:solidFill>
+                    <a:srgbClr val="9CDCFE"/>
+                  </a:solidFill>
+                  <a:latin typeface="Cascadia Code" panose="020B0609020000020004" pitchFamily="34" charset="0"/>
+                </a:rPr>
+                <a:t>    </a:t>
+              </a:r>
+              <a:r>
+                <a:rPr lang="en-US" sz="2000" b="0" dirty="0" err="1">
+                  <a:solidFill>
+                    <a:srgbClr val="9CDCFE"/>
+                  </a:solidFill>
+                  <a:effectLst/>
+                  <a:latin typeface="Cascadia Code" panose="020B0609020000020004" pitchFamily="34" charset="0"/>
+                </a:rPr>
+                <a:t>ModuleDescription</a:t>
+              </a:r>
+              <a:r>
+                <a:rPr lang="en-US" sz="2000" b="0" dirty="0">
+                  <a:solidFill>
+                    <a:srgbClr val="D4D4D4"/>
+                  </a:solidFill>
+                  <a:effectLst/>
+                  <a:latin typeface="Cascadia Code" panose="020B0609020000020004" pitchFamily="34" charset="0"/>
+                </a:rPr>
+                <a:t> = </a:t>
+              </a:r>
+              <a:r>
+                <a:rPr lang="en-US" sz="2000" b="0" dirty="0">
+                  <a:solidFill>
+                    <a:srgbClr val="CE9178"/>
+                  </a:solidFill>
+                  <a:effectLst/>
+                  <a:latin typeface="Cascadia Code" panose="020B0609020000020004" pitchFamily="34" charset="0"/>
+                </a:rPr>
+                <a:t>'A PowerShell module to read and write</a:t>
+              </a:r>
+            </a:p>
+            <a:p>
+              <a:pPr>
+                <a:buNone/>
+              </a:pPr>
+              <a:r>
+                <a:rPr lang="en-US" sz="2000" dirty="0">
+                  <a:solidFill>
+                    <a:srgbClr val="CE9178"/>
+                  </a:solidFill>
+                  <a:latin typeface="Cascadia Code" panose="020B0609020000020004" pitchFamily="34" charset="0"/>
+                </a:rPr>
+                <a:t>				</a:t>
+              </a:r>
+              <a:r>
+                <a:rPr lang="en-US" sz="2000" b="0" dirty="0">
+                  <a:solidFill>
+                    <a:srgbClr val="CE9178"/>
+                  </a:solidFill>
+                  <a:effectLst/>
+                  <a:latin typeface="Cascadia Code" panose="020B0609020000020004" pitchFamily="34" charset="0"/>
+                </a:rPr>
+                <a:t>messages in Azure Storage Queues.’</a:t>
+              </a:r>
+              <a:endParaRPr lang="en-US" sz="2000" b="0" dirty="0">
+                <a:solidFill>
+                  <a:srgbClr val="CCCCCC"/>
+                </a:solidFill>
+                <a:effectLst/>
+                <a:latin typeface="Cascadia Code" panose="020B0609020000020004" pitchFamily="34" charset="0"/>
+              </a:endParaRPr>
+            </a:p>
+            <a:p>
+              <a:pPr>
+                <a:buNone/>
+              </a:pPr>
+              <a:r>
+                <a:rPr lang="en-US" sz="2000" dirty="0">
+                  <a:solidFill>
+                    <a:srgbClr val="9CDCFE"/>
+                  </a:solidFill>
+                  <a:latin typeface="Cascadia Code" panose="020B0609020000020004" pitchFamily="34" charset="0"/>
+                </a:rPr>
+                <a:t>    </a:t>
+              </a:r>
+              <a:r>
+                <a:rPr lang="en-US" sz="2000" b="0" dirty="0" err="1">
+                  <a:solidFill>
+                    <a:srgbClr val="9CDCFE"/>
+                  </a:solidFill>
+                  <a:effectLst/>
+                  <a:latin typeface="Cascadia Code" panose="020B0609020000020004" pitchFamily="34" charset="0"/>
+                </a:rPr>
+                <a:t>ModuleVersion</a:t>
+              </a:r>
+              <a:r>
+                <a:rPr lang="en-US" sz="2000" b="0" dirty="0">
+                  <a:solidFill>
+                    <a:srgbClr val="D4D4D4"/>
+                  </a:solidFill>
+                  <a:effectLst/>
+                  <a:latin typeface="Cascadia Code" panose="020B0609020000020004" pitchFamily="34" charset="0"/>
+                </a:rPr>
+                <a:t> = </a:t>
+              </a:r>
+              <a:r>
+                <a:rPr lang="en-US" sz="2000" b="0" dirty="0">
+                  <a:solidFill>
+                    <a:srgbClr val="CE9178"/>
+                  </a:solidFill>
+                  <a:effectLst/>
+                  <a:latin typeface="Cascadia Code" panose="020B0609020000020004" pitchFamily="34" charset="0"/>
+                </a:rPr>
+                <a:t>'1.0.0’</a:t>
+              </a:r>
+              <a:endParaRPr lang="en-US" sz="2000" b="0" dirty="0">
+                <a:solidFill>
+                  <a:srgbClr val="CCCCCC"/>
+                </a:solidFill>
+                <a:effectLst/>
+                <a:latin typeface="Cascadia Code" panose="020B0609020000020004" pitchFamily="34" charset="0"/>
+              </a:endParaRPr>
+            </a:p>
+            <a:p>
+              <a:pPr>
+                <a:buNone/>
+              </a:pPr>
+              <a:r>
+                <a:rPr lang="en-US" sz="2000" dirty="0">
+                  <a:solidFill>
+                    <a:srgbClr val="9CDCFE"/>
+                  </a:solidFill>
+                  <a:latin typeface="Cascadia Code" panose="020B0609020000020004" pitchFamily="34" charset="0"/>
+                </a:rPr>
+                <a:t>    </a:t>
+              </a:r>
+              <a:r>
+                <a:rPr lang="en-US" sz="2000" b="0" dirty="0" err="1">
+                  <a:solidFill>
+                    <a:srgbClr val="9CDCFE"/>
+                  </a:solidFill>
+                  <a:effectLst/>
+                  <a:latin typeface="Cascadia Code" panose="020B0609020000020004" pitchFamily="34" charset="0"/>
+                </a:rPr>
+                <a:t>ModuleAuthor</a:t>
+              </a:r>
+              <a:r>
+                <a:rPr lang="en-US" sz="2000" b="0" dirty="0">
+                  <a:solidFill>
+                    <a:srgbClr val="D4D4D4"/>
+                  </a:solidFill>
+                  <a:effectLst/>
+                  <a:latin typeface="Cascadia Code" panose="020B0609020000020004" pitchFamily="34" charset="0"/>
+                </a:rPr>
+                <a:t> = </a:t>
+              </a:r>
+              <a:r>
+                <a:rPr lang="en-US" sz="2000" b="0" dirty="0">
+                  <a:solidFill>
+                    <a:srgbClr val="CE9178"/>
+                  </a:solidFill>
+                  <a:effectLst/>
+                  <a:latin typeface="Cascadia Code" panose="020B0609020000020004" pitchFamily="34" charset="0"/>
+                </a:rPr>
+                <a:t>'Emanuel Palm’</a:t>
+              </a:r>
+              <a:endParaRPr lang="en-US" sz="2000" b="0" dirty="0">
+                <a:solidFill>
+                  <a:srgbClr val="CCCCCC"/>
+                </a:solidFill>
+                <a:effectLst/>
+                <a:latin typeface="Cascadia Code" panose="020B0609020000020004" pitchFamily="34" charset="0"/>
+              </a:endParaRPr>
+            </a:p>
+            <a:p>
+              <a:pPr>
+                <a:buNone/>
+              </a:pPr>
+              <a:r>
+                <a:rPr lang="en-US" sz="2000" dirty="0">
+                  <a:solidFill>
+                    <a:srgbClr val="9CDCFE"/>
+                  </a:solidFill>
+                  <a:latin typeface="Cascadia Code" panose="020B0609020000020004" pitchFamily="34" charset="0"/>
+                </a:rPr>
+                <a:t>    </a:t>
+              </a:r>
+              <a:r>
+                <a:rPr lang="en-US" sz="2000" b="0" dirty="0" err="1">
+                  <a:solidFill>
+                    <a:srgbClr val="9CDCFE"/>
+                  </a:solidFill>
+                  <a:effectLst/>
+                  <a:latin typeface="Cascadia Code" panose="020B0609020000020004" pitchFamily="34" charset="0"/>
+                </a:rPr>
+                <a:t>LicenseType</a:t>
+              </a:r>
+              <a:r>
+                <a:rPr lang="en-US" sz="2000" b="0" dirty="0">
+                  <a:solidFill>
+                    <a:srgbClr val="D4D4D4"/>
+                  </a:solidFill>
+                  <a:effectLst/>
+                  <a:latin typeface="Cascadia Code" panose="020B0609020000020004" pitchFamily="34" charset="0"/>
+                </a:rPr>
+                <a:t> = </a:t>
+              </a:r>
+              <a:r>
+                <a:rPr lang="en-US" sz="2000" b="0" dirty="0">
+                  <a:solidFill>
+                    <a:srgbClr val="CE9178"/>
+                  </a:solidFill>
+                  <a:effectLst/>
+                  <a:latin typeface="Cascadia Code" panose="020B0609020000020004" pitchFamily="34" charset="0"/>
+                </a:rPr>
+                <a:t>'MIT’</a:t>
+              </a:r>
+              <a:endParaRPr lang="en-US" sz="2000" b="0" dirty="0">
+                <a:solidFill>
+                  <a:srgbClr val="CCCCCC"/>
+                </a:solidFill>
+                <a:effectLst/>
+                <a:latin typeface="Cascadia Code" panose="020B0609020000020004" pitchFamily="34" charset="0"/>
+              </a:endParaRPr>
+            </a:p>
+            <a:p>
+              <a:pPr>
+                <a:buNone/>
+              </a:pPr>
+              <a:r>
+                <a:rPr lang="en-US" sz="2000" dirty="0">
+                  <a:solidFill>
+                    <a:srgbClr val="9CDCFE"/>
+                  </a:solidFill>
+                  <a:latin typeface="Cascadia Code" panose="020B0609020000020004" pitchFamily="34" charset="0"/>
+                </a:rPr>
+                <a:t>    </a:t>
+              </a:r>
+              <a:r>
+                <a:rPr lang="en-US" sz="2000" b="0" dirty="0" err="1">
+                  <a:solidFill>
+                    <a:srgbClr val="9CDCFE"/>
+                  </a:solidFill>
+                  <a:effectLst/>
+                  <a:latin typeface="Cascadia Code" panose="020B0609020000020004" pitchFamily="34" charset="0"/>
+                </a:rPr>
+                <a:t>DestinationPath</a:t>
+              </a:r>
+              <a:r>
+                <a:rPr lang="en-US" sz="2000" b="0" dirty="0">
+                  <a:solidFill>
+                    <a:srgbClr val="D4D4D4"/>
+                  </a:solidFill>
+                  <a:effectLst/>
+                  <a:latin typeface="Cascadia Code" panose="020B0609020000020004" pitchFamily="34" charset="0"/>
+                </a:rPr>
+                <a:t> = </a:t>
+              </a:r>
+              <a:r>
+                <a:rPr lang="en-US" sz="2000" b="0" dirty="0">
+                  <a:solidFill>
+                    <a:srgbClr val="DCDCAA"/>
+                  </a:solidFill>
+                  <a:effectLst/>
+                  <a:latin typeface="Cascadia Code" panose="020B0609020000020004" pitchFamily="34" charset="0"/>
+                </a:rPr>
+                <a:t>Resolve-Path</a:t>
+              </a:r>
+              <a:r>
+                <a:rPr lang="en-US" sz="2000" b="0" dirty="0">
+                  <a:solidFill>
+                    <a:srgbClr val="D4D4D4"/>
+                  </a:solidFill>
+                  <a:effectLst/>
+                  <a:latin typeface="Cascadia Code" panose="020B0609020000020004" pitchFamily="34" charset="0"/>
+                </a:rPr>
+                <a:t> </a:t>
+              </a:r>
+              <a:r>
+                <a:rPr lang="en-US" sz="2000" b="0" dirty="0">
+                  <a:solidFill>
+                    <a:srgbClr val="CE9178"/>
+                  </a:solidFill>
+                  <a:effectLst/>
+                  <a:latin typeface="Cascadia Code" panose="020B0609020000020004" pitchFamily="34" charset="0"/>
+                </a:rPr>
+                <a:t>'..’</a:t>
+              </a:r>
+              <a:endParaRPr lang="en-US" sz="2000" b="0" dirty="0">
+                <a:solidFill>
+                  <a:srgbClr val="CCCCCC"/>
+                </a:solidFill>
+                <a:effectLst/>
+                <a:latin typeface="Cascadia Code" panose="020B0609020000020004" pitchFamily="34" charset="0"/>
+              </a:endParaRPr>
+            </a:p>
+            <a:p>
+              <a:pPr>
+                <a:buNone/>
+              </a:pPr>
+              <a:r>
+                <a:rPr lang="en-US" sz="2000" dirty="0">
+                  <a:solidFill>
+                    <a:srgbClr val="9CDCFE"/>
+                  </a:solidFill>
+                  <a:latin typeface="Cascadia Code" panose="020B0609020000020004" pitchFamily="34" charset="0"/>
+                </a:rPr>
+                <a:t>    </a:t>
+              </a:r>
+              <a:r>
+                <a:rPr lang="en-US" sz="2000" b="0" dirty="0" err="1">
+                  <a:solidFill>
+                    <a:srgbClr val="9CDCFE"/>
+                  </a:solidFill>
+                  <a:effectLst/>
+                  <a:latin typeface="Cascadia Code" panose="020B0609020000020004" pitchFamily="34" charset="0"/>
+                </a:rPr>
+                <a:t>ModuleType</a:t>
+              </a:r>
+              <a:r>
+                <a:rPr lang="en-US" sz="2000" b="0" dirty="0">
+                  <a:solidFill>
+                    <a:srgbClr val="D4D4D4"/>
+                  </a:solidFill>
+                  <a:effectLst/>
+                  <a:latin typeface="Cascadia Code" panose="020B0609020000020004" pitchFamily="34" charset="0"/>
+                </a:rPr>
+                <a:t> = </a:t>
+              </a:r>
+              <a:r>
+                <a:rPr lang="en-US" sz="2000" b="0" dirty="0">
+                  <a:solidFill>
+                    <a:srgbClr val="CE9178"/>
+                  </a:solidFill>
+                  <a:effectLst/>
+                  <a:latin typeface="Cascadia Code" panose="020B0609020000020004" pitchFamily="34" charset="0"/>
+                </a:rPr>
+                <a:t>'</a:t>
+              </a:r>
+              <a:r>
+                <a:rPr lang="en-US" sz="2000" b="0" dirty="0" err="1">
+                  <a:solidFill>
+                    <a:srgbClr val="CE9178"/>
+                  </a:solidFill>
+                  <a:effectLst/>
+                  <a:latin typeface="Cascadia Code" panose="020B0609020000020004" pitchFamily="34" charset="0"/>
+                </a:rPr>
+                <a:t>SimpleModule</a:t>
+              </a:r>
+              <a:r>
+                <a:rPr lang="en-US" sz="2000" b="0" dirty="0">
+                  <a:solidFill>
+                    <a:srgbClr val="CE9178"/>
+                  </a:solidFill>
+                  <a:effectLst/>
+                  <a:latin typeface="Cascadia Code" panose="020B0609020000020004" pitchFamily="34" charset="0"/>
+                </a:rPr>
+                <a:t>’</a:t>
+              </a:r>
+              <a:endParaRPr lang="en-US" sz="2000" b="0" dirty="0">
+                <a:solidFill>
+                  <a:srgbClr val="CCCCCC"/>
+                </a:solidFill>
+                <a:effectLst/>
+                <a:latin typeface="Cascadia Code" panose="020B0609020000020004" pitchFamily="34" charset="0"/>
+              </a:endParaRPr>
+            </a:p>
+            <a:p>
+              <a:pPr>
+                <a:buNone/>
+              </a:pPr>
+              <a:r>
+                <a:rPr lang="en-US" sz="2000" b="0" dirty="0">
+                  <a:solidFill>
+                    <a:srgbClr val="D4D4D4"/>
+                  </a:solidFill>
+                  <a:effectLst/>
+                  <a:latin typeface="Cascadia Code" panose="020B0609020000020004" pitchFamily="34" charset="0"/>
+                </a:rPr>
+                <a:t>}</a:t>
+              </a:r>
+            </a:p>
+            <a:p>
+              <a:pPr>
+                <a:buNone/>
+              </a:pPr>
+              <a:endParaRPr lang="en-US" sz="2000" b="0" dirty="0">
+                <a:solidFill>
+                  <a:srgbClr val="CCCCCC"/>
+                </a:solidFill>
+                <a:effectLst/>
+                <a:latin typeface="Cascadia Code" panose="020B0609020000020004" pitchFamily="34" charset="0"/>
+              </a:endParaRPr>
+            </a:p>
+            <a:p>
+              <a:pPr>
+                <a:buNone/>
+              </a:pPr>
+              <a:r>
+                <a:rPr lang="en-US" sz="2000" b="0" dirty="0">
+                  <a:solidFill>
+                    <a:srgbClr val="DCDCAA"/>
+                  </a:solidFill>
+                  <a:effectLst/>
+                  <a:latin typeface="Cascadia Code" panose="020B0609020000020004" pitchFamily="34" charset="0"/>
+                </a:rPr>
+                <a:t>New-</a:t>
+              </a:r>
+              <a:r>
+                <a:rPr lang="en-US" sz="2000" b="0" dirty="0" err="1">
+                  <a:solidFill>
+                    <a:srgbClr val="DCDCAA"/>
+                  </a:solidFill>
+                  <a:effectLst/>
+                  <a:latin typeface="Cascadia Code" panose="020B0609020000020004" pitchFamily="34" charset="0"/>
+                </a:rPr>
+                <a:t>SampleModule</a:t>
+              </a:r>
+              <a:r>
+                <a:rPr lang="en-US" sz="2000" b="0" dirty="0">
+                  <a:solidFill>
+                    <a:srgbClr val="D4D4D4"/>
+                  </a:solidFill>
+                  <a:effectLst/>
+                  <a:latin typeface="Cascadia Code" panose="020B0609020000020004" pitchFamily="34" charset="0"/>
+                </a:rPr>
+                <a:t> </a:t>
+              </a:r>
+              <a:r>
+                <a:rPr lang="en-US" sz="2000" b="0" dirty="0">
+                  <a:solidFill>
+                    <a:srgbClr val="9CDCFE"/>
+                  </a:solidFill>
+                  <a:effectLst/>
+                  <a:latin typeface="Cascadia Code" panose="020B0609020000020004" pitchFamily="34" charset="0"/>
+                </a:rPr>
+                <a:t>@</a:t>
+              </a:r>
+              <a:r>
+                <a:rPr lang="en-US" sz="2000" b="0" dirty="0" err="1">
+                  <a:solidFill>
+                    <a:srgbClr val="9CDCFE"/>
+                  </a:solidFill>
+                  <a:effectLst/>
+                  <a:latin typeface="Cascadia Code" panose="020B0609020000020004" pitchFamily="34" charset="0"/>
+                </a:rPr>
+                <a:t>ModuleSplat</a:t>
+              </a:r>
+              <a:endParaRPr lang="en-US" sz="2000" b="0" dirty="0">
+                <a:solidFill>
+                  <a:srgbClr val="CCCCCC"/>
+                </a:solidFill>
+                <a:effectLst/>
+                <a:latin typeface="Cascadia Code" panose="020B0609020000020004" pitchFamily="34" charset="0"/>
+              </a:endParaRPr>
+            </a:p>
+          </p:txBody>
+        </p:sp>
+      </p:grpSp>
     </p:spTree>
     <p:extLst>
       <p:ext uri="{BB962C8B-B14F-4D97-AF65-F5344CB8AC3E}">
-        <p14:creationId xmlns:p14="http://schemas.microsoft.com/office/powerpoint/2010/main" val="4247451374"/>
+        <p14:creationId xmlns:p14="http://schemas.microsoft.com/office/powerpoint/2010/main" val="3606911638"/>
       </p:ext>
     </p:extLst>
   </p:cSld>
@@ -23755,7 +24219,7 @@
                             </p:stCondLst>
                             <p:childTnLst>
                               <p:par>
-                                <p:cTn id="10" presetID="10" presetClass="entr" presetSubtype="0" fill="hold" grpId="0" nodeType="clickEffect">
+                                <p:cTn id="10" presetID="10" presetClass="entr" presetSubtype="0" fill="hold" nodeType="clickEffect">
                                   <p:stCondLst>
                                     <p:cond delay="0"/>
                                   </p:stCondLst>
@@ -23768,11 +24232,7 @@
                                           </p:stCondLst>
                                         </p:cTn>
                                         <p:tgtEl>
-                                          <p:spTgt spid="3">
-                                            <p:txEl>
-                                              <p:pRg st="2" end="2"/>
-                                            </p:txEl>
-                                          </p:spTgt>
+                                          <p:spTgt spid="7"/>
                                         </p:tgtEl>
                                         <p:attrNameLst>
                                           <p:attrName>style.visibility</p:attrName>
@@ -23786,11 +24246,7 @@
                                       <p:cBhvr>
                                         <p:cTn id="12" dur="500"/>
                                         <p:tgtEl>
-                                          <p:spTgt spid="3">
-                                            <p:txEl>
-                                              <p:pRg st="2" end="2"/>
-                                            </p:txEl>
-                                          </p:spTgt>
+                                          <p:spTgt spid="7"/>
                                         </p:tgtEl>
                                       </p:cBhvr>
                                     </p:animEffect>
@@ -23816,14 +24272,249 @@
                             </p:stCondLst>
                             <p:childTnLst>
                               <p:par>
-                                <p:cTn id="15" presetID="10" presetClass="entr" presetSubtype="0" fill="hold" grpId="0" nodeType="clickEffect">
+                                <p:cTn id="15" presetID="10" presetClass="exit" presetSubtype="0" fill="hold" nodeType="clickEffect">
+                                  <p:stCondLst>
+                                    <p:cond delay="0"/>
+                                  </p:stCondLst>
+                                  <p:childTnLst>
+                                    <p:animEffect transition="out" filter="fade">
+                                      <p:cBhvr>
+                                        <p:cTn id="16" dur="500"/>
+                                        <p:tgtEl>
+                                          <p:spTgt spid="7"/>
+                                        </p:tgtEl>
+                                      </p:cBhvr>
+                                    </p:animEffect>
+                                    <p:set>
+                                      <p:cBhvr>
+                                        <p:cTn id="17" dur="1" fill="hold">
+                                          <p:stCondLst>
+                                            <p:cond delay="499"/>
+                                          </p:stCondLst>
+                                        </p:cTn>
+                                        <p:tgtEl>
+                                          <p:spTgt spid="7"/>
+                                        </p:tgtEl>
+                                        <p:attrNameLst>
+                                          <p:attrName>style.visibility</p:attrName>
+                                        </p:attrNameLst>
+                                      </p:cBhvr>
+                                      <p:to>
+                                        <p:strVal val="hidden"/>
+                                      </p:to>
+                                    </p:set>
+                                  </p:childTnLst>
+                                </p:cTn>
+                              </p:par>
+                              <p:par>
+                                <p:cTn id="18" presetID="10" presetClass="entr" presetSubtype="0" fill="hold" nodeType="withEffect">
                                   <p:stCondLst>
                                     <p:cond delay="0"/>
                                   </p:stCondLst>
                                   <p:childTnLst>
                                     <p:set>
                                       <p:cBhvr>
-                                        <p:cTn id="16" dur="1" fill="hold">
+                                        <p:cTn id="19" dur="1" fill="hold">
+                                          <p:stCondLst>
+                                            <p:cond delay="0"/>
+                                          </p:stCondLst>
+                                        </p:cTn>
+                                        <p:tgtEl>
+                                          <p:spTgt spid="5"/>
+                                        </p:tgtEl>
+                                        <p:attrNameLst>
+                                          <p:attrName>style.visibility</p:attrName>
+                                        </p:attrNameLst>
+                                      </p:cBhvr>
+                                      <p:to>
+                                        <p:strVal val="visible"/>
+                                      </p:to>
+                                    </p:set>
+                                    <p:animEffect transition="in" filter="fade">
+                                      <p:cBhvr>
+                                        <p:cTn id="20" dur="500"/>
+                                        <p:tgtEl>
+                                          <p:spTgt spid="5"/>
+                                        </p:tgtEl>
+                                      </p:cBhvr>
+                                    </p:animEffect>
+                                  </p:childTnLst>
+                                </p:cTn>
+                              </p:par>
+                            </p:childTnLst>
+                          </p:cTn>
+                        </p:par>
+                      </p:childTnLst>
+                    </p:cTn>
+                  </p:par>
+                  <p:par>
+                    <p:cTn id="21" fill="hold">
+                      <p:stCondLst>
+                        <p:cond delay="indefinite"/>
+                      </p:stCondLst>
+                      <p:childTnLst>
+                        <p:par>
+                          <p:cTn id="22" fill="hold">
+                            <p:stCondLst>
+                              <p:cond delay="0"/>
+                            </p:stCondLst>
+                            <p:childTnLst>
+                              <p:par>
+                                <p:cTn id="23" presetID="10" presetClass="entr" presetSubtype="0" fill="hold" grpId="0" nodeType="clickEffect">
+                                  <p:stCondLst>
+                                    <p:cond delay="0"/>
+                                  </p:stCondLst>
+                                  <p:childTnLst>
+                                    <p:set>
+                                      <p:cBhvr>
+                                        <p:cTn id="24" dur="1" fill="hold">
+                                          <p:stCondLst>
+                                            <p:cond delay="0"/>
+                                          </p:stCondLst>
+                                        </p:cTn>
+                                        <p:tgtEl>
+                                          <p:spTgt spid="3">
+                                            <p:txEl>
+                                              <p:pRg st="1" end="1"/>
+                                            </p:txEl>
+                                          </p:spTgt>
+                                        </p:tgtEl>
+                                        <p:attrNameLst>
+                                          <p:attrName>style.visibility</p:attrName>
+                                        </p:attrNameLst>
+                                      </p:cBhvr>
+                                      <p:to>
+                                        <p:strVal val="visible"/>
+                                      </p:to>
+                                    </p:set>
+                                    <p:animEffect transition="in" filter="fade">
+                                      <p:cBhvr>
+                                        <p:cTn id="25" dur="500"/>
+                                        <p:tgtEl>
+                                          <p:spTgt spid="3">
+                                            <p:txEl>
+                                              <p:pRg st="1" end="1"/>
+                                            </p:txEl>
+                                          </p:spTgt>
+                                        </p:tgtEl>
+                                      </p:cBhvr>
+                                    </p:animEffect>
+                                  </p:childTnLst>
+                                </p:cTn>
+                              </p:par>
+                            </p:childTnLst>
+                          </p:cTn>
+                        </p:par>
+                      </p:childTnLst>
+                    </p:cTn>
+                  </p:par>
+                  <p:par>
+                    <p:cTn id="26" fill="hold">
+                      <p:stCondLst>
+                        <p:cond delay="indefinite"/>
+                      </p:stCondLst>
+                      <p:childTnLst>
+                        <p:par>
+                          <p:cTn id="27" fill="hold">
+                            <p:stCondLst>
+                              <p:cond delay="0"/>
+                            </p:stCondLst>
+                            <p:childTnLst>
+                              <p:par>
+                                <p:cTn id="28" presetID="10" presetClass="entr" presetSubtype="0" fill="hold" grpId="0" nodeType="clickEffect">
+                                  <p:stCondLst>
+                                    <p:cond delay="0"/>
+                                  </p:stCondLst>
+                                  <p:childTnLst>
+                                    <p:set>
+                                      <p:cBhvr>
+                                        <p:cTn id="29" dur="1" fill="hold">
+                                          <p:stCondLst>
+                                            <p:cond delay="0"/>
+                                          </p:stCondLst>
+                                        </p:cTn>
+                                        <p:tgtEl>
+                                          <p:spTgt spid="3">
+                                            <p:txEl>
+                                              <p:pRg st="2" end="2"/>
+                                            </p:txEl>
+                                          </p:spTgt>
+                                        </p:tgtEl>
+                                        <p:attrNameLst>
+                                          <p:attrName>style.visibility</p:attrName>
+                                        </p:attrNameLst>
+                                      </p:cBhvr>
+                                      <p:to>
+                                        <p:strVal val="visible"/>
+                                      </p:to>
+                                    </p:set>
+                                    <p:animEffect transition="in" filter="fade">
+                                      <p:cBhvr>
+                                        <p:cTn id="30" dur="500"/>
+                                        <p:tgtEl>
+                                          <p:spTgt spid="3">
+                                            <p:txEl>
+                                              <p:pRg st="2" end="2"/>
+                                            </p:txEl>
+                                          </p:spTgt>
+                                        </p:tgtEl>
+                                      </p:cBhvr>
+                                    </p:animEffect>
+                                  </p:childTnLst>
+                                </p:cTn>
+                              </p:par>
+                              <p:par>
+                                <p:cTn id="31" presetID="10" presetClass="entr" presetSubtype="0" fill="hold" grpId="0" nodeType="withEffect">
+                                  <p:stCondLst>
+                                    <p:cond delay="0"/>
+                                  </p:stCondLst>
+                                  <p:childTnLst>
+                                    <p:set>
+                                      <p:cBhvr>
+                                        <p:cTn id="32" dur="1" fill="hold">
+                                          <p:stCondLst>
+                                            <p:cond delay="0"/>
+                                          </p:stCondLst>
+                                        </p:cTn>
+                                        <p:tgtEl>
+                                          <p:spTgt spid="3">
+                                            <p:txEl>
+                                              <p:pRg st="3" end="3"/>
+                                            </p:txEl>
+                                          </p:spTgt>
+                                        </p:tgtEl>
+                                        <p:attrNameLst>
+                                          <p:attrName>style.visibility</p:attrName>
+                                        </p:attrNameLst>
+                                      </p:cBhvr>
+                                      <p:to>
+                                        <p:strVal val="visible"/>
+                                      </p:to>
+                                    </p:set>
+                                    <p:animEffect transition="in" filter="fade">
+                                      <p:cBhvr>
+                                        <p:cTn id="33" dur="500"/>
+                                        <p:tgtEl>
+                                          <p:spTgt spid="3">
+                                            <p:txEl>
+                                              <p:pRg st="3" end="3"/>
+                                            </p:txEl>
+                                          </p:spTgt>
+                                        </p:tgtEl>
+                                      </p:cBhvr>
+                                    </p:animEffect>
+                                  </p:childTnLst>
+                                </p:cTn>
+                              </p:par>
+                              <p:par>
+                                <p:cTn id="34" presetID="10" presetClass="entr" presetSubtype="0" fill="hold" grpId="0" nodeType="withEffect">
+                                  <p:stCondLst>
+                                    <p:cond delay="0"/>
+                                  </p:stCondLst>
+                                  <p:childTnLst>
+                                    <p:set>
+                                      <p:cBhvr>
+                                        <p:cTn id="35" dur="1" fill="hold">
                                           <p:stCondLst>
                                             <p:cond delay="0"/>
                                           </p:stCondLst>
@@ -23845,11 +24536,158 @@
                                     </p:set>
                                     <p:animEffect transition="in" filter="fade">
                                       <p:cBhvr>
-                                        <p:cTn id="17" dur="500"/>
+                                        <p:cTn id="36" dur="500"/>
                                         <p:tgtEl>
                                           <p:spTgt spid="3">
                                             <p:txEl>
                                               <p:pRg st="4" end="4"/>
+                                            </p:txEl>
+                                          </p:spTgt>
+                                        </p:tgtEl>
+                                      </p:cBhvr>
+                                    </p:animEffect>
+                                  </p:childTnLst>
+                                </p:cTn>
+                              </p:par>
+                              <p:par>
+                                <p:cTn id="37" presetID="10" presetClass="entr" presetSubtype="0" fill="hold" grpId="0" nodeType="withEffect">
+                                  <p:stCondLst>
+                                    <p:cond delay="0"/>
+                                  </p:stCondLst>
+                                  <p:childTnLst>
+                                    <p:set>
+                                      <p:cBhvr>
+                                        <p:cTn id="38" dur="1" fill="hold">
+                                          <p:stCondLst>
+                                            <p:cond delay="0"/>
+                                          </p:stCondLst>
+                                        </p:cTn>
+                                        <p:tgtEl>
+                                          <p:spTgt spid="3">
+                                            <p:txEl>
+                                              <p:pRg st="5" end="5"/>
+                                            </p:txEl>
+                                          </p:spTgt>
+                                        </p:tgtEl>
+                                        <p:attrNameLst>
+                                          <p:attrName>style.visibility</p:attrName>
+                                        </p:attrNameLst>
+                                      </p:cBhvr>
+                                      <p:to>
+                                        <p:strVal val="visible"/>
+                                      </p:to>
+                                    </p:set>
+                                    <p:animEffect transition="in" filter="fade">
+                                      <p:cBhvr>
+                                        <p:cTn id="39" dur="500"/>
+                                        <p:tgtEl>
+                                          <p:spTgt spid="3">
+                                            <p:txEl>
+                                              <p:pRg st="5" end="5"/>
+                                            </p:txEl>
+                                          </p:spTgt>
+                                        </p:tgtEl>
+                                      </p:cBhvr>
+                                    </p:animEffect>
+                                  </p:childTnLst>
+                                </p:cTn>
+                              </p:par>
+                              <p:par>
+                                <p:cTn id="40" presetID="10" presetClass="entr" presetSubtype="0" fill="hold" grpId="0" nodeType="withEffect">
+                                  <p:stCondLst>
+                                    <p:cond delay="0"/>
+                                  </p:stCondLst>
+                                  <p:childTnLst>
+                                    <p:set>
+                                      <p:cBhvr>
+                                        <p:cTn id="41" dur="1" fill="hold">
+                                          <p:stCondLst>
+                                            <p:cond delay="0"/>
+                                          </p:stCondLst>
+                                        </p:cTn>
+                                        <p:tgtEl>
+                                          <p:spTgt spid="3">
+                                            <p:txEl>
+                                              <p:pRg st="6" end="6"/>
+                                            </p:txEl>
+                                          </p:spTgt>
+                                        </p:tgtEl>
+                                        <p:attrNameLst>
+                                          <p:attrName>style.visibility</p:attrName>
+                                        </p:attrNameLst>
+                                      </p:cBhvr>
+                                      <p:to>
+                                        <p:strVal val="visible"/>
+                                      </p:to>
+                                    </p:set>
+                                    <p:animEffect transition="in" filter="fade">
+                                      <p:cBhvr>
+                                        <p:cTn id="42" dur="500"/>
+                                        <p:tgtEl>
+                                          <p:spTgt spid="3">
+                                            <p:txEl>
+                                              <p:pRg st="6" end="6"/>
+                                            </p:txEl>
+                                          </p:spTgt>
+                                        </p:tgtEl>
+                                      </p:cBhvr>
+                                    </p:animEffect>
+                                  </p:childTnLst>
+                                </p:cTn>
+                              </p:par>
+                            </p:childTnLst>
+                          </p:cTn>
+                        </p:par>
+                      </p:childTnLst>
+                    </p:cTn>
+                  </p:par>
+                  <p:par>
+                    <p:cTn id="43" fill="hold">
+                      <p:stCondLst>
+                        <p:cond delay="indefinite"/>
+                      </p:stCondLst>
+                      <p:childTnLst>
+                        <p:par>
+                          <p:cTn id="44" fill="hold">
+                            <p:stCondLst>
+                              <p:cond delay="0"/>
+                            </p:stCondLst>
+                            <p:childTnLst>
+                              <p:par>
+                                <p:cTn id="45" presetID="10" presetClass="entr" presetSubtype="0" fill="hold" grpId="0" nodeType="clickEffect">
+                                  <p:stCondLst>
+                                    <p:cond delay="0"/>
+                                  </p:stCondLst>
+                                  <p:childTnLst>
+                                    <p:set>
+                                      <p:cBhvr>
+                                        <p:cTn id="46" dur="1" fill="hold">
+                                          <p:stCondLst>
+                                            <p:cond delay="0"/>
+                                          </p:stCondLst>
+                                        </p:cTn>
+                                        <p:tgtEl>
+                                          <p:spTgt spid="3">
+                                            <p:txEl>
+                                              <p:pRg st="7" end="7"/>
+                                            </p:txEl>
+                                          </p:spTgt>
+                                        </p:tgtEl>
+                                        <p:attrNameLst>
+                                          <p:attrName>style.visibility</p:attrName>
+                                        </p:attrNameLst>
+                                      </p:cBhvr>
+                                      <p:to>
+                                        <p:strVal val="visible"/>
+                                      </p:to>
+                                    </p:set>
+                                    <p:animEffect transition="in" filter="fade">
+                                      <p:cBhvr>
+                                        <p:cTn id="47" dur="500"/>
+                                        <p:tgtEl>
+                                          <p:spTgt spid="3">
+                                            <p:txEl>
+                                              <p:pRg st="7" end="7"/>
                                             </p:txEl>
                                           </p:spTgt>
                                         </p:tgtEl>
@@ -23892,7 +24730,1572 @@
 </p:sld>
 </file>
 
+<file path=ppt/slides/slide24.xml><?xml version="1.0" encoding="utf-8"?>
+<p:sld xmlns:a="http://schemas.openxmlformats.org/drawingml/2006/main" xmlns:r="http://schemas.openxmlformats.org/officeDocument/2006/relationships" xmlns:p="http://schemas.openxmlformats.org/presentationml/2006/main">
+  <p:cSld>
+    <p:spTree>
+      <p:nvGrpSpPr>
+        <p:cNvPr id="1" name=""/>
+        <p:cNvGrpSpPr/>
+        <p:nvPr/>
+      </p:nvGrpSpPr>
+      <p:grpSpPr>
+        <a:xfrm>
+          <a:off x="0" y="0"/>
+          <a:ext cx="0" cy="0"/>
+          <a:chOff x="0" y="0"/>
+          <a:chExt cx="0" cy="0"/>
+        </a:xfrm>
+      </p:grpSpPr>
+      <p:sp>
+        <p:nvSpPr>
+          <p:cNvPr id="2" name="Title 1">
+            <a:extLst>
+              <a:ext uri="{FF2B5EF4-FFF2-40B4-BE49-F238E27FC236}">
+                <a16:creationId xmlns:a16="http://schemas.microsoft.com/office/drawing/2014/main" id="{7D0E4A3C-D125-3EEE-CCEA-78B0A1AAC85B}"/>
+              </a:ext>
+            </a:extLst>
+          </p:cNvPr>
+          <p:cNvSpPr>
+            <a:spLocks noGrp="1"/>
+          </p:cNvSpPr>
+          <p:nvPr>
+            <p:ph type="title"/>
+          </p:nvPr>
+        </p:nvSpPr>
+        <p:spPr>
+          <a:xfrm>
+            <a:off x="1229360" y="1062326"/>
+            <a:ext cx="9733280" cy="4733348"/>
+          </a:xfrm>
+        </p:spPr>
+        <p:txBody>
+          <a:bodyPr>
+            <a:normAutofit/>
+          </a:bodyPr>
+          <a:lstStyle/>
+          <a:p>
+            <a:r>
+              <a:rPr lang="en-US" sz="6000" dirty="0"/>
+              <a:t>Struggles </a:t>
+            </a:r>
+            <a:r>
+              <a:rPr lang="en-US" sz="6000" dirty="0">
+                <a:solidFill>
+                  <a:srgbClr val="CEA551"/>
+                </a:solidFill>
+              </a:rPr>
+              <a:t>&amp;</a:t>
+            </a:r>
+            <a:br>
+              <a:rPr lang="en-US" sz="6000" dirty="0"/>
+            </a:br>
+            <a:r>
+              <a:rPr lang="en-US" sz="6000" dirty="0"/>
+              <a:t>Lessons Learned </a:t>
+            </a:r>
+            <a:r>
+              <a:rPr lang="en-US" sz="6000" dirty="0">
+                <a:solidFill>
+                  <a:srgbClr val="CEA551"/>
+                </a:solidFill>
+              </a:rPr>
+              <a:t>&amp;</a:t>
+            </a:r>
+            <a:br>
+              <a:rPr lang="en-US" sz="6000" dirty="0"/>
+            </a:br>
+            <a:r>
+              <a:rPr lang="en-US" sz="6000" dirty="0"/>
+              <a:t>Takeaways </a:t>
+            </a:r>
+            <a:r>
+              <a:rPr lang="en-US" sz="6000" dirty="0">
+                <a:solidFill>
+                  <a:srgbClr val="CEA551"/>
+                </a:solidFill>
+              </a:rPr>
+              <a:t>&amp;</a:t>
+            </a:r>
+            <a:br>
+              <a:rPr lang="en-US" sz="6000" dirty="0"/>
+            </a:br>
+            <a:r>
+              <a:rPr lang="en-US" sz="6000" dirty="0">
+                <a:solidFill>
+                  <a:srgbClr val="336297"/>
+                </a:solidFill>
+              </a:rPr>
+              <a:t>What have we done</a:t>
+            </a:r>
+          </a:p>
+        </p:txBody>
+      </p:sp>
+    </p:spTree>
+    <p:extLst>
+      <p:ext uri="{BB962C8B-B14F-4D97-AF65-F5344CB8AC3E}">
+        <p14:creationId xmlns:p14="http://schemas.microsoft.com/office/powerpoint/2010/main" val="3679030425"/>
+      </p:ext>
+    </p:extLst>
+  </p:cSld>
+  <p:clrMapOvr>
+    <a:masterClrMapping/>
+  </p:clrMapOvr>
+</p:sld>
+</file>
+
 <file path=ppt/slides/slide25.xml><?xml version="1.0" encoding="utf-8"?>
+<p:sld xmlns:a="http://schemas.openxmlformats.org/drawingml/2006/main" xmlns:r="http://schemas.openxmlformats.org/officeDocument/2006/relationships" xmlns:p="http://schemas.openxmlformats.org/presentationml/2006/main">
+  <p:cSld>
+    <p:spTree>
+      <p:nvGrpSpPr>
+        <p:cNvPr id="1" name="">
+          <a:extLst>
+            <a:ext uri="{FF2B5EF4-FFF2-40B4-BE49-F238E27FC236}">
+              <a16:creationId xmlns:a16="http://schemas.microsoft.com/office/drawing/2014/main" id="{76AEA0D1-315F-BF54-ECCD-F8AAD9B128F9}"/>
+            </a:ext>
+          </a:extLst>
+        </p:cNvPr>
+        <p:cNvGrpSpPr/>
+        <p:nvPr/>
+      </p:nvGrpSpPr>
+      <p:grpSpPr>
+        <a:xfrm>
+          <a:off x="0" y="0"/>
+          <a:ext cx="0" cy="0"/>
+          <a:chOff x="0" y="0"/>
+          <a:chExt cx="0" cy="0"/>
+        </a:xfrm>
+      </p:grpSpPr>
+      <p:sp>
+        <p:nvSpPr>
+          <p:cNvPr id="2" name="Title 1">
+            <a:extLst>
+              <a:ext uri="{FF2B5EF4-FFF2-40B4-BE49-F238E27FC236}">
+                <a16:creationId xmlns:a16="http://schemas.microsoft.com/office/drawing/2014/main" id="{0D3D25E2-33DB-7279-FEBD-ADBE024C43E6}"/>
+              </a:ext>
+            </a:extLst>
+          </p:cNvPr>
+          <p:cNvSpPr>
+            <a:spLocks noGrp="1"/>
+          </p:cNvSpPr>
+          <p:nvPr>
+            <p:ph type="title"/>
+          </p:nvPr>
+        </p:nvSpPr>
+        <p:spPr/>
+        <p:txBody>
+          <a:bodyPr/>
+          <a:lstStyle/>
+          <a:p>
+            <a:r>
+              <a:rPr lang="en-US" dirty="0"/>
+              <a:t>It’s not all ☀️ and 🌈, but</a:t>
+            </a:r>
+          </a:p>
+        </p:txBody>
+      </p:sp>
+      <p:sp>
+        <p:nvSpPr>
+          <p:cNvPr id="3" name="Content Placeholder 2">
+            <a:extLst>
+              <a:ext uri="{FF2B5EF4-FFF2-40B4-BE49-F238E27FC236}">
+                <a16:creationId xmlns:a16="http://schemas.microsoft.com/office/drawing/2014/main" id="{99AB525F-97BC-2BEE-E22C-A0C60AC6BCB5}"/>
+              </a:ext>
+            </a:extLst>
+          </p:cNvPr>
+          <p:cNvSpPr>
+            <a:spLocks noGrp="1"/>
+          </p:cNvSpPr>
+          <p:nvPr>
+            <p:ph idx="1"/>
+          </p:nvPr>
+        </p:nvSpPr>
+        <p:spPr/>
+        <p:txBody>
+          <a:bodyPr>
+            <a:normAutofit fontScale="62500" lnSpcReduction="20000"/>
+          </a:bodyPr>
+          <a:lstStyle/>
+          <a:p>
+            <a:r>
+              <a:rPr lang="en-US" dirty="0"/>
+              <a:t>Assembly Conflicts </a:t>
+            </a:r>
+            <a:r>
+              <a:rPr lang="en-US" dirty="0">
+                <a:sym typeface="Wingdings" pitchFamily="2" charset="2"/>
+              </a:rPr>
+              <a:t></a:t>
+            </a:r>
+            <a:endParaRPr lang="en-US" dirty="0"/>
+          </a:p>
+          <a:p>
+            <a:pPr lvl="1"/>
+            <a:r>
+              <a:rPr lang="en-US" dirty="0"/>
+              <a:t>The truth is that ALCs are a necessity</a:t>
+            </a:r>
+          </a:p>
+          <a:p>
+            <a:r>
+              <a:rPr lang="en-US" dirty="0"/>
+              <a:t>Overengineering is </a:t>
+            </a:r>
+            <a:r>
+              <a:rPr lang="en-US" b="1" dirty="0"/>
+              <a:t>Easy</a:t>
+            </a:r>
+          </a:p>
+          <a:p>
+            <a:pPr lvl="1"/>
+            <a:r>
+              <a:rPr lang="en-US" dirty="0"/>
+              <a:t>Base cmdlet inheritance</a:t>
+            </a:r>
+          </a:p>
+          <a:p>
+            <a:pPr lvl="1"/>
+            <a:r>
+              <a:rPr lang="en-US" dirty="0"/>
+              <a:t>Parameter sets</a:t>
+            </a:r>
+          </a:p>
+          <a:p>
+            <a:pPr lvl="1"/>
+            <a:r>
+              <a:rPr lang="en-US" dirty="0"/>
+              <a:t>Common services</a:t>
+            </a:r>
+          </a:p>
+          <a:p>
+            <a:r>
+              <a:rPr lang="en-US" dirty="0"/>
+              <a:t>Taking dependencies</a:t>
+            </a:r>
+          </a:p>
+          <a:p>
+            <a:pPr lvl="1"/>
+            <a:r>
+              <a:rPr lang="en-US" dirty="0"/>
+              <a:t>Less code needed </a:t>
+            </a:r>
+            <a:r>
+              <a:rPr lang="en-US" dirty="0">
+                <a:sym typeface="Wingdings" pitchFamily="2" charset="2"/>
+              </a:rPr>
+              <a:t></a:t>
+            </a:r>
+            <a:endParaRPr lang="en-US" dirty="0"/>
+          </a:p>
+          <a:p>
+            <a:pPr lvl="1"/>
+            <a:r>
+              <a:rPr lang="en-US" dirty="0"/>
+              <a:t>More updates needed </a:t>
+            </a:r>
+            <a:r>
+              <a:rPr lang="en-US" dirty="0">
+                <a:sym typeface="Wingdings" pitchFamily="2" charset="2"/>
+              </a:rPr>
+              <a:t></a:t>
+            </a:r>
+            <a:endParaRPr lang="en-US" dirty="0"/>
+          </a:p>
+          <a:p>
+            <a:r>
+              <a:rPr lang="en-US" dirty="0"/>
+              <a:t>Utilize the available tooling</a:t>
+            </a:r>
+          </a:p>
+          <a:p>
+            <a:pPr lvl="1"/>
+            <a:r>
+              <a:rPr lang="en-US" dirty="0"/>
+              <a:t>Community tools for PowerShell Modules</a:t>
+            </a:r>
+          </a:p>
+          <a:p>
+            <a:pPr lvl="1"/>
+            <a:r>
+              <a:rPr lang="en-US" dirty="0"/>
+              <a:t>Pipelines – Automate Build / Test / Release!</a:t>
+            </a:r>
+          </a:p>
+          <a:p>
+            <a:pPr lvl="1"/>
+            <a:r>
+              <a:rPr lang="en-US" dirty="0"/>
+              <a:t>GitHub Copilot &amp; </a:t>
+            </a:r>
+            <a:r>
+              <a:rPr lang="en-US" dirty="0" err="1"/>
+              <a:t>Dependabot</a:t>
+            </a:r>
+            <a:endParaRPr lang="en-US" dirty="0"/>
+          </a:p>
+          <a:p>
+            <a:r>
+              <a:rPr lang="en-US" dirty="0"/>
+              <a:t>Binary modules aren’t scary </a:t>
+            </a:r>
+            <a:r>
+              <a:rPr lang="en-US" dirty="0">
+                <a:sym typeface="Wingdings" pitchFamily="2" charset="2"/>
+              </a:rPr>
+              <a:t></a:t>
+            </a:r>
+            <a:endParaRPr lang="en-US" dirty="0"/>
+          </a:p>
+        </p:txBody>
+      </p:sp>
+    </p:spTree>
+    <p:extLst>
+      <p:ext uri="{BB962C8B-B14F-4D97-AF65-F5344CB8AC3E}">
+        <p14:creationId xmlns:p14="http://schemas.microsoft.com/office/powerpoint/2010/main" val="1010718325"/>
+      </p:ext>
+    </p:extLst>
+  </p:cSld>
+  <p:clrMapOvr>
+    <a:masterClrMapping/>
+  </p:clrMapOvr>
+  <p:timing>
+    <p:tnLst>
+      <p:par>
+        <p:cTn id="1" dur="indefinite" restart="never" nodeType="tmRoot">
+          <p:childTnLst>
+            <p:seq concurrent="1" nextAc="seek">
+              <p:cTn id="2" dur="indefinite" nodeType="mainSeq">
+                <p:childTnLst>
+                  <p:par>
+                    <p:cTn id="3" fill="hold">
+                      <p:stCondLst>
+                        <p:cond delay="indefinite"/>
+                      </p:stCondLst>
+                      <p:childTnLst>
+                        <p:par>
+                          <p:cTn id="4" fill="hold">
+                            <p:stCondLst>
+                              <p:cond delay="0"/>
+                            </p:stCondLst>
+                            <p:childTnLst>
+                              <p:par>
+                                <p:cTn id="5" presetID="10" presetClass="entr" presetSubtype="0" fill="hold" grpId="0" nodeType="clickEffect">
+                                  <p:stCondLst>
+                                    <p:cond delay="0"/>
+                                  </p:stCondLst>
+                                  <p:childTnLst>
+                                    <p:set>
+                                      <p:cBhvr>
+                                        <p:cTn id="6" dur="1" fill="hold">
+                                          <p:stCondLst>
+                                            <p:cond delay="0"/>
+                                          </p:stCondLst>
+                                        </p:cTn>
+                                        <p:tgtEl>
+                                          <p:spTgt spid="3">
+                                            <p:txEl>
+                                              <p:pRg st="0" end="0"/>
+                                            </p:txEl>
+                                          </p:spTgt>
+                                        </p:tgtEl>
+                                        <p:attrNameLst>
+                                          <p:attrName>style.visibility</p:attrName>
+                                        </p:attrNameLst>
+                                      </p:cBhvr>
+                                      <p:to>
+                                        <p:strVal val="visible"/>
+                                      </p:to>
+                                    </p:set>
+                                    <p:animEffect transition="in" filter="fade">
+                                      <p:cBhvr>
+                                        <p:cTn id="7" dur="500"/>
+                                        <p:tgtEl>
+                                          <p:spTgt spid="3">
+                                            <p:txEl>
+                                              <p:pRg st="0" end="0"/>
+                                            </p:txEl>
+                                          </p:spTgt>
+                                        </p:tgtEl>
+                                      </p:cBhvr>
+                                    </p:animEffect>
+                                  </p:childTnLst>
+                                </p:cTn>
+                              </p:par>
+                              <p:par>
+                                <p:cTn id="8" presetID="10" presetClass="entr" presetSubtype="0" fill="hold" grpId="0" nodeType="withEffect">
+                                  <p:stCondLst>
+                                    <p:cond delay="0"/>
+                                  </p:stCondLst>
+                                  <p:childTnLst>
+                                    <p:set>
+                                      <p:cBhvr>
+                                        <p:cTn id="9" dur="1" fill="hold">
+                                          <p:stCondLst>
+                                            <p:cond delay="0"/>
+                                          </p:stCondLst>
+                                        </p:cTn>
+                                        <p:tgtEl>
+                                          <p:spTgt spid="3">
+                                            <p:txEl>
+                                              <p:pRg st="1" end="1"/>
+                                            </p:txEl>
+                                          </p:spTgt>
+                                        </p:tgtEl>
+                                        <p:attrNameLst>
+                                          <p:attrName>style.visibility</p:attrName>
+                                        </p:attrNameLst>
+                                      </p:cBhvr>
+                                      <p:to>
+                                        <p:strVal val="visible"/>
+                                      </p:to>
+                                    </p:set>
+                                    <p:animEffect transition="in" filter="fade">
+                                      <p:cBhvr>
+                                        <p:cTn id="10" dur="500"/>
+                                        <p:tgtEl>
+                                          <p:spTgt spid="3">
+                                            <p:txEl>
+                                              <p:pRg st="1" end="1"/>
+                                            </p:txEl>
+                                          </p:spTgt>
+                                        </p:tgtEl>
+                                      </p:cBhvr>
+                                    </p:animEffect>
+                                  </p:childTnLst>
+                                </p:cTn>
+                              </p:par>
+                            </p:childTnLst>
+                          </p:cTn>
+                        </p:par>
+                      </p:childTnLst>
+                    </p:cTn>
+                  </p:par>
+                  <p:par>
+                    <p:cTn id="11" fill="hold">
+                      <p:stCondLst>
+                        <p:cond delay="indefinite"/>
+                      </p:stCondLst>
+                      <p:childTnLst>
+                        <p:par>
+                          <p:cTn id="12" fill="hold">
+                            <p:stCondLst>
+                              <p:cond delay="0"/>
+                            </p:stCondLst>
+                            <p:childTnLst>
+                              <p:par>
+                                <p:cTn id="13" presetID="10" presetClass="entr" presetSubtype="0" fill="hold" grpId="0" nodeType="clickEffect">
+                                  <p:stCondLst>
+                                    <p:cond delay="0"/>
+                                  </p:stCondLst>
+                                  <p:childTnLst>
+                                    <p:set>
+                                      <p:cBhvr>
+                                        <p:cTn id="14" dur="1" fill="hold">
+                                          <p:stCondLst>
+                                            <p:cond delay="0"/>
+                                          </p:stCondLst>
+                                        </p:cTn>
+                                        <p:tgtEl>
+                                          <p:spTgt spid="3">
+                                            <p:txEl>
+                                              <p:pRg st="2" end="2"/>
+                                            </p:txEl>
+                                          </p:spTgt>
+                                        </p:tgtEl>
+                                        <p:attrNameLst>
+                                          <p:attrName>style.visibility</p:attrName>
+                                        </p:attrNameLst>
+                                      </p:cBhvr>
+                                      <p:to>
+                                        <p:strVal val="visible"/>
+                                      </p:to>
+                                    </p:set>
+                                    <p:animEffect transition="in" filter="fade">
+                                      <p:cBhvr>
+                                        <p:cTn id="15" dur="500"/>
+                                        <p:tgtEl>
+                                          <p:spTgt spid="3">
+                                            <p:txEl>
+                                              <p:pRg st="2" end="2"/>
+                                            </p:txEl>
+                                          </p:spTgt>
+                                        </p:tgtEl>
+                                      </p:cBhvr>
+                                    </p:animEffect>
+                                  </p:childTnLst>
+                                </p:cTn>
+                              </p:par>
+                              <p:par>
+                                <p:cTn id="16" presetID="10" presetClass="entr" presetSubtype="0" fill="hold" grpId="0" nodeType="withEffect">
+                                  <p:stCondLst>
+                                    <p:cond delay="0"/>
+                                  </p:stCondLst>
+                                  <p:childTnLst>
+                                    <p:set>
+                                      <p:cBhvr>
+                                        <p:cTn id="17" dur="1" fill="hold">
+                                          <p:stCondLst>
+                                            <p:cond delay="0"/>
+                                          </p:stCondLst>
+                                        </p:cTn>
+                                        <p:tgtEl>
+                                          <p:spTgt spid="3">
+                                            <p:txEl>
+                                              <p:pRg st="3" end="3"/>
+                                            </p:txEl>
+                                          </p:spTgt>
+                                        </p:tgtEl>
+                                        <p:attrNameLst>
+                                          <p:attrName>style.visibility</p:attrName>
+                                        </p:attrNameLst>
+                                      </p:cBhvr>
+                                      <p:to>
+                                        <p:strVal val="visible"/>
+                                      </p:to>
+                                    </p:set>
+                                    <p:animEffect transition="in" filter="fade">
+                                      <p:cBhvr>
+                                        <p:cTn id="18" dur="500"/>
+                                        <p:tgtEl>
+                                          <p:spTgt spid="3">
+                                            <p:txEl>
+                                              <p:pRg st="3" end="3"/>
+                                            </p:txEl>
+                                          </p:spTgt>
+                                        </p:tgtEl>
+                                      </p:cBhvr>
+                                    </p:animEffect>
+                                  </p:childTnLst>
+                                </p:cTn>
+                              </p:par>
+                              <p:par>
+                                <p:cTn id="19" presetID="10" presetClass="entr" presetSubtype="0" fill="hold" grpId="0" nodeType="withEffect">
+                                  <p:stCondLst>
+                                    <p:cond delay="0"/>
+                                  </p:stCondLst>
+                                  <p:childTnLst>
+                                    <p:set>
+                                      <p:cBhvr>
+                                        <p:cTn id="20" dur="1" fill="hold">
+                                          <p:stCondLst>
+                                            <p:cond delay="0"/>
+                                          </p:stCondLst>
+                                        </p:cTn>
+                                        <p:tgtEl>
+                                          <p:spTgt spid="3">
+                                            <p:txEl>
+                                              <p:pRg st="4" end="4"/>
+                                            </p:txEl>
+                                          </p:spTgt>
+                                        </p:tgtEl>
+                                        <p:attrNameLst>
+                                          <p:attrName>style.visibility</p:attrName>
+                                        </p:attrNameLst>
+                                      </p:cBhvr>
+                                      <p:to>
+                                        <p:strVal val="visible"/>
+                                      </p:to>
+                                    </p:set>
+                                    <p:animEffect transition="in" filter="fade">
+                                      <p:cBhvr>
+                                        <p:cTn id="21" dur="500"/>
+                                        <p:tgtEl>
+                                          <p:spTgt spid="3">
+                                            <p:txEl>
+                                              <p:pRg st="4" end="4"/>
+                                            </p:txEl>
+                                          </p:spTgt>
+                                        </p:tgtEl>
+                                      </p:cBhvr>
+                                    </p:animEffect>
+                                  </p:childTnLst>
+                                </p:cTn>
+                              </p:par>
+                              <p:par>
+                                <p:cTn id="22" presetID="10" presetClass="entr" presetSubtype="0" fill="hold" grpId="0" nodeType="withEffect">
+                                  <p:stCondLst>
+                                    <p:cond delay="0"/>
+                                  </p:stCondLst>
+                                  <p:childTnLst>
+                                    <p:set>
+                                      <p:cBhvr>
+                                        <p:cTn id="23" dur="1" fill="hold">
+                                          <p:stCondLst>
+                                            <p:cond delay="0"/>
+                                          </p:stCondLst>
+                                        </p:cTn>
+                                        <p:tgtEl>
+                                          <p:spTgt spid="3">
+                                            <p:txEl>
+                                              <p:pRg st="5" end="5"/>
+                                            </p:txEl>
+                                          </p:spTgt>
+                                        </p:tgtEl>
+                                        <p:attrNameLst>
+                                          <p:attrName>style.visibility</p:attrName>
+                                        </p:attrNameLst>
+                                      </p:cBhvr>
+                                      <p:to>
+                                        <p:strVal val="visible"/>
+                                      </p:to>
+                                    </p:set>
+                                    <p:animEffect transition="in" filter="fade">
+                                      <p:cBhvr>
+                                        <p:cTn id="24" dur="500"/>
+                                        <p:tgtEl>
+                                          <p:spTgt spid="3">
+                                            <p:txEl>
+                                              <p:pRg st="5" end="5"/>
+                                            </p:txEl>
+                                          </p:spTgt>
+                                        </p:tgtEl>
+                                      </p:cBhvr>
+                                    </p:animEffect>
+                                  </p:childTnLst>
+                                </p:cTn>
+                              </p:par>
+                              <p:par>
+                                <p:cTn id="25" presetID="9" presetClass="emph" presetSubtype="0" grpId="1" nodeType="withEffect">
+                                  <p:stCondLst>
+                                    <p:cond delay="0"/>
+                                  </p:stCondLst>
+                                  <p:childTnLst>
+                                    <p:set>
+                                      <p:cBhvr>
+                                        <p:cTn id="26" dur="indefinite"/>
+                                        <p:tgtEl>
+                                          <p:spTgt spid="3">
+                                            <p:txEl>
+                                              <p:pRg st="0" end="0"/>
+                                            </p:txEl>
+                                          </p:spTgt>
+                                        </p:tgtEl>
+                                        <p:attrNameLst>
+                                          <p:attrName>style.opacity</p:attrName>
+                                        </p:attrNameLst>
+                                      </p:cBhvr>
+                                      <p:to>
+                                        <p:strVal val="0.5"/>
+                                      </p:to>
+                                    </p:set>
+                                    <p:animEffect filter="image" prLst="opacity: 0.5">
+                                      <p:cBhvr rctx="IE">
+                                        <p:cTn id="27" dur="indefinite"/>
+                                        <p:tgtEl>
+                                          <p:spTgt spid="3">
+                                            <p:txEl>
+                                              <p:pRg st="0" end="0"/>
+                                            </p:txEl>
+                                          </p:spTgt>
+                                        </p:tgtEl>
+                                      </p:cBhvr>
+                                    </p:animEffect>
+                                  </p:childTnLst>
+                                </p:cTn>
+                              </p:par>
+                              <p:par>
+                                <p:cTn id="28" presetID="9" presetClass="emph" presetSubtype="0" grpId="1" nodeType="withEffect">
+                                  <p:stCondLst>
+                                    <p:cond delay="0"/>
+                                  </p:stCondLst>
+                                  <p:childTnLst>
+                                    <p:set>
+                                      <p:cBhvr>
+                                        <p:cTn id="29" dur="indefinite"/>
+                                        <p:tgtEl>
+                                          <p:spTgt spid="3">
+                                            <p:txEl>
+                                              <p:pRg st="1" end="1"/>
+                                            </p:txEl>
+                                          </p:spTgt>
+                                        </p:tgtEl>
+                                        <p:attrNameLst>
+                                          <p:attrName>style.opacity</p:attrName>
+                                        </p:attrNameLst>
+                                      </p:cBhvr>
+                                      <p:to>
+                                        <p:strVal val="0.5"/>
+                                      </p:to>
+                                    </p:set>
+                                    <p:animEffect filter="image" prLst="opacity: 0.5">
+                                      <p:cBhvr rctx="IE">
+                                        <p:cTn id="30" dur="indefinite"/>
+                                        <p:tgtEl>
+                                          <p:spTgt spid="3">
+                                            <p:txEl>
+                                              <p:pRg st="1" end="1"/>
+                                            </p:txEl>
+                                          </p:spTgt>
+                                        </p:tgtEl>
+                                      </p:cBhvr>
+                                    </p:animEffect>
+                                  </p:childTnLst>
+                                </p:cTn>
+                              </p:par>
+                            </p:childTnLst>
+                          </p:cTn>
+                        </p:par>
+                      </p:childTnLst>
+                    </p:cTn>
+                  </p:par>
+                  <p:par>
+                    <p:cTn id="31" fill="hold">
+                      <p:stCondLst>
+                        <p:cond delay="indefinite"/>
+                      </p:stCondLst>
+                      <p:childTnLst>
+                        <p:par>
+                          <p:cTn id="32" fill="hold">
+                            <p:stCondLst>
+                              <p:cond delay="0"/>
+                            </p:stCondLst>
+                            <p:childTnLst>
+                              <p:par>
+                                <p:cTn id="33" presetID="10" presetClass="entr" presetSubtype="0" fill="hold" grpId="0" nodeType="clickEffect">
+                                  <p:stCondLst>
+                                    <p:cond delay="0"/>
+                                  </p:stCondLst>
+                                  <p:childTnLst>
+                                    <p:set>
+                                      <p:cBhvr>
+                                        <p:cTn id="34" dur="1" fill="hold">
+                                          <p:stCondLst>
+                                            <p:cond delay="0"/>
+                                          </p:stCondLst>
+                                        </p:cTn>
+                                        <p:tgtEl>
+                                          <p:spTgt spid="3">
+                                            <p:txEl>
+                                              <p:pRg st="6" end="6"/>
+                                            </p:txEl>
+                                          </p:spTgt>
+                                        </p:tgtEl>
+                                        <p:attrNameLst>
+                                          <p:attrName>style.visibility</p:attrName>
+                                        </p:attrNameLst>
+                                      </p:cBhvr>
+                                      <p:to>
+                                        <p:strVal val="visible"/>
+                                      </p:to>
+                                    </p:set>
+                                    <p:animEffect transition="in" filter="fade">
+                                      <p:cBhvr>
+                                        <p:cTn id="35" dur="500"/>
+                                        <p:tgtEl>
+                                          <p:spTgt spid="3">
+                                            <p:txEl>
+                                              <p:pRg st="6" end="6"/>
+                                            </p:txEl>
+                                          </p:spTgt>
+                                        </p:tgtEl>
+                                      </p:cBhvr>
+                                    </p:animEffect>
+                                  </p:childTnLst>
+                                </p:cTn>
+                              </p:par>
+                              <p:par>
+                                <p:cTn id="36" presetID="10" presetClass="entr" presetSubtype="0" fill="hold" grpId="0" nodeType="withEffect">
+                                  <p:stCondLst>
+                                    <p:cond delay="0"/>
+                                  </p:stCondLst>
+                                  <p:childTnLst>
+                                    <p:set>
+                                      <p:cBhvr>
+                                        <p:cTn id="37" dur="1" fill="hold">
+                                          <p:stCondLst>
+                                            <p:cond delay="0"/>
+                                          </p:stCondLst>
+                                        </p:cTn>
+                                        <p:tgtEl>
+                                          <p:spTgt spid="3">
+                                            <p:txEl>
+                                              <p:pRg st="7" end="7"/>
+                                            </p:txEl>
+                                          </p:spTgt>
+                                        </p:tgtEl>
+                                        <p:attrNameLst>
+                                          <p:attrName>style.visibility</p:attrName>
+                                        </p:attrNameLst>
+                                      </p:cBhvr>
+                                      <p:to>
+                                        <p:strVal val="visible"/>
+                                      </p:to>
+                                    </p:set>
+                                    <p:animEffect transition="in" filter="fade">
+                                      <p:cBhvr>
+                                        <p:cTn id="38" dur="500"/>
+                                        <p:tgtEl>
+                                          <p:spTgt spid="3">
+                                            <p:txEl>
+                                              <p:pRg st="7" end="7"/>
+                                            </p:txEl>
+                                          </p:spTgt>
+                                        </p:tgtEl>
+                                      </p:cBhvr>
+                                    </p:animEffect>
+                                  </p:childTnLst>
+                                </p:cTn>
+                              </p:par>
+                              <p:par>
+                                <p:cTn id="39" presetID="10" presetClass="entr" presetSubtype="0" fill="hold" grpId="0" nodeType="withEffect">
+                                  <p:stCondLst>
+                                    <p:cond delay="0"/>
+                                  </p:stCondLst>
+                                  <p:childTnLst>
+                                    <p:set>
+                                      <p:cBhvr>
+                                        <p:cTn id="40" dur="1" fill="hold">
+                                          <p:stCondLst>
+                                            <p:cond delay="0"/>
+                                          </p:stCondLst>
+                                        </p:cTn>
+                                        <p:tgtEl>
+                                          <p:spTgt spid="3">
+                                            <p:txEl>
+                                              <p:pRg st="8" end="8"/>
+                                            </p:txEl>
+                                          </p:spTgt>
+                                        </p:tgtEl>
+                                        <p:attrNameLst>
+                                          <p:attrName>style.visibility</p:attrName>
+                                        </p:attrNameLst>
+                                      </p:cBhvr>
+                                      <p:to>
+                                        <p:strVal val="visible"/>
+                                      </p:to>
+                                    </p:set>
+                                    <p:animEffect transition="in" filter="fade">
+                                      <p:cBhvr>
+                                        <p:cTn id="41" dur="500"/>
+                                        <p:tgtEl>
+                                          <p:spTgt spid="3">
+                                            <p:txEl>
+                                              <p:pRg st="8" end="8"/>
+                                            </p:txEl>
+                                          </p:spTgt>
+                                        </p:tgtEl>
+                                      </p:cBhvr>
+                                    </p:animEffect>
+                                  </p:childTnLst>
+                                </p:cTn>
+                              </p:par>
+                              <p:par>
+                                <p:cTn id="42" presetID="9" presetClass="emph" presetSubtype="0" grpId="1" nodeType="withEffect">
+                                  <p:stCondLst>
+                                    <p:cond delay="0"/>
+                                  </p:stCondLst>
+                                  <p:childTnLst>
+                                    <p:set>
+                                      <p:cBhvr>
+                                        <p:cTn id="43" dur="indefinite"/>
+                                        <p:tgtEl>
+                                          <p:spTgt spid="3">
+                                            <p:txEl>
+                                              <p:pRg st="2" end="2"/>
+                                            </p:txEl>
+                                          </p:spTgt>
+                                        </p:tgtEl>
+                                        <p:attrNameLst>
+                                          <p:attrName>style.opacity</p:attrName>
+                                        </p:attrNameLst>
+                                      </p:cBhvr>
+                                      <p:to>
+                                        <p:strVal val="0.5"/>
+                                      </p:to>
+                                    </p:set>
+                                    <p:animEffect filter="image" prLst="opacity: 0.5">
+                                      <p:cBhvr rctx="IE">
+                                        <p:cTn id="44" dur="indefinite"/>
+                                        <p:tgtEl>
+                                          <p:spTgt spid="3">
+                                            <p:txEl>
+                                              <p:pRg st="2" end="2"/>
+                                            </p:txEl>
+                                          </p:spTgt>
+                                        </p:tgtEl>
+                                      </p:cBhvr>
+                                    </p:animEffect>
+                                  </p:childTnLst>
+                                </p:cTn>
+                              </p:par>
+                              <p:par>
+                                <p:cTn id="45" presetID="9" presetClass="emph" presetSubtype="0" grpId="1" nodeType="withEffect">
+                                  <p:stCondLst>
+                                    <p:cond delay="0"/>
+                                  </p:stCondLst>
+                                  <p:childTnLst>
+                                    <p:set>
+                                      <p:cBhvr>
+                                        <p:cTn id="46" dur="indefinite"/>
+                                        <p:tgtEl>
+                                          <p:spTgt spid="3">
+                                            <p:txEl>
+                                              <p:pRg st="3" end="3"/>
+                                            </p:txEl>
+                                          </p:spTgt>
+                                        </p:tgtEl>
+                                        <p:attrNameLst>
+                                          <p:attrName>style.opacity</p:attrName>
+                                        </p:attrNameLst>
+                                      </p:cBhvr>
+                                      <p:to>
+                                        <p:strVal val="0.5"/>
+                                      </p:to>
+                                    </p:set>
+                                    <p:animEffect filter="image" prLst="opacity: 0.5">
+                                      <p:cBhvr rctx="IE">
+                                        <p:cTn id="47" dur="indefinite"/>
+                                        <p:tgtEl>
+                                          <p:spTgt spid="3">
+                                            <p:txEl>
+                                              <p:pRg st="3" end="3"/>
+                                            </p:txEl>
+                                          </p:spTgt>
+                                        </p:tgtEl>
+                                      </p:cBhvr>
+                                    </p:animEffect>
+                                  </p:childTnLst>
+                                </p:cTn>
+                              </p:par>
+                              <p:par>
+                                <p:cTn id="48" presetID="9" presetClass="emph" presetSubtype="0" grpId="1" nodeType="withEffect">
+                                  <p:stCondLst>
+                                    <p:cond delay="0"/>
+                                  </p:stCondLst>
+                                  <p:childTnLst>
+                                    <p:set>
+                                      <p:cBhvr>
+                                        <p:cTn id="49" dur="indefinite"/>
+                                        <p:tgtEl>
+                                          <p:spTgt spid="3">
+                                            <p:txEl>
+                                              <p:pRg st="4" end="4"/>
+                                            </p:txEl>
+                                          </p:spTgt>
+                                        </p:tgtEl>
+                                        <p:attrNameLst>
+                                          <p:attrName>style.opacity</p:attrName>
+                                        </p:attrNameLst>
+                                      </p:cBhvr>
+                                      <p:to>
+                                        <p:strVal val="0.5"/>
+                                      </p:to>
+                                    </p:set>
+                                    <p:animEffect filter="image" prLst="opacity: 0.5">
+                                      <p:cBhvr rctx="IE">
+                                        <p:cTn id="50" dur="indefinite"/>
+                                        <p:tgtEl>
+                                          <p:spTgt spid="3">
+                                            <p:txEl>
+                                              <p:pRg st="4" end="4"/>
+                                            </p:txEl>
+                                          </p:spTgt>
+                                        </p:tgtEl>
+                                      </p:cBhvr>
+                                    </p:animEffect>
+                                  </p:childTnLst>
+                                </p:cTn>
+                              </p:par>
+                              <p:par>
+                                <p:cTn id="51" presetID="9" presetClass="emph" presetSubtype="0" grpId="1" nodeType="withEffect">
+                                  <p:stCondLst>
+                                    <p:cond delay="0"/>
+                                  </p:stCondLst>
+                                  <p:childTnLst>
+                                    <p:set>
+                                      <p:cBhvr>
+                                        <p:cTn id="52" dur="indefinite"/>
+                                        <p:tgtEl>
+                                          <p:spTgt spid="3">
+                                            <p:txEl>
+                                              <p:pRg st="5" end="5"/>
+                                            </p:txEl>
+                                          </p:spTgt>
+                                        </p:tgtEl>
+                                        <p:attrNameLst>
+                                          <p:attrName>style.opacity</p:attrName>
+                                        </p:attrNameLst>
+                                      </p:cBhvr>
+                                      <p:to>
+                                        <p:strVal val="0.5"/>
+                                      </p:to>
+                                    </p:set>
+                                    <p:animEffect filter="image" prLst="opacity: 0.5">
+                                      <p:cBhvr rctx="IE">
+                                        <p:cTn id="53" dur="indefinite"/>
+                                        <p:tgtEl>
+                                          <p:spTgt spid="3">
+                                            <p:txEl>
+                                              <p:pRg st="5" end="5"/>
+                                            </p:txEl>
+                                          </p:spTgt>
+                                        </p:tgtEl>
+                                      </p:cBhvr>
+                                    </p:animEffect>
+                                  </p:childTnLst>
+                                </p:cTn>
+                              </p:par>
+                            </p:childTnLst>
+                          </p:cTn>
+                        </p:par>
+                      </p:childTnLst>
+                    </p:cTn>
+                  </p:par>
+                  <p:par>
+                    <p:cTn id="54" fill="hold">
+                      <p:stCondLst>
+                        <p:cond delay="indefinite"/>
+                      </p:stCondLst>
+                      <p:childTnLst>
+                        <p:par>
+                          <p:cTn id="55" fill="hold">
+                            <p:stCondLst>
+                              <p:cond delay="0"/>
+                            </p:stCondLst>
+                            <p:childTnLst>
+                              <p:par>
+                                <p:cTn id="56" presetID="10" presetClass="entr" presetSubtype="0" fill="hold" grpId="0" nodeType="clickEffect">
+                                  <p:stCondLst>
+                                    <p:cond delay="0"/>
+                                  </p:stCondLst>
+                                  <p:childTnLst>
+                                    <p:set>
+                                      <p:cBhvr>
+                                        <p:cTn id="57" dur="1" fill="hold">
+                                          <p:stCondLst>
+                                            <p:cond delay="0"/>
+                                          </p:stCondLst>
+                                        </p:cTn>
+                                        <p:tgtEl>
+                                          <p:spTgt spid="3">
+                                            <p:txEl>
+                                              <p:pRg st="9" end="9"/>
+                                            </p:txEl>
+                                          </p:spTgt>
+                                        </p:tgtEl>
+                                        <p:attrNameLst>
+                                          <p:attrName>style.visibility</p:attrName>
+                                        </p:attrNameLst>
+                                      </p:cBhvr>
+                                      <p:to>
+                                        <p:strVal val="visible"/>
+                                      </p:to>
+                                    </p:set>
+                                    <p:animEffect transition="in" filter="fade">
+                                      <p:cBhvr>
+                                        <p:cTn id="58" dur="500"/>
+                                        <p:tgtEl>
+                                          <p:spTgt spid="3">
+                                            <p:txEl>
+                                              <p:pRg st="9" end="9"/>
+                                            </p:txEl>
+                                          </p:spTgt>
+                                        </p:tgtEl>
+                                      </p:cBhvr>
+                                    </p:animEffect>
+                                  </p:childTnLst>
+                                </p:cTn>
+                              </p:par>
+                              <p:par>
+                                <p:cTn id="59" presetID="10" presetClass="entr" presetSubtype="0" fill="hold" grpId="0" nodeType="withEffect">
+                                  <p:stCondLst>
+                                    <p:cond delay="0"/>
+                                  </p:stCondLst>
+                                  <p:childTnLst>
+                                    <p:set>
+                                      <p:cBhvr>
+                                        <p:cTn id="60" dur="1" fill="hold">
+                                          <p:stCondLst>
+                                            <p:cond delay="0"/>
+                                          </p:stCondLst>
+                                        </p:cTn>
+                                        <p:tgtEl>
+                                          <p:spTgt spid="3">
+                                            <p:txEl>
+                                              <p:pRg st="10" end="10"/>
+                                            </p:txEl>
+                                          </p:spTgt>
+                                        </p:tgtEl>
+                                        <p:attrNameLst>
+                                          <p:attrName>style.visibility</p:attrName>
+                                        </p:attrNameLst>
+                                      </p:cBhvr>
+                                      <p:to>
+                                        <p:strVal val="visible"/>
+                                      </p:to>
+                                    </p:set>
+                                    <p:animEffect transition="in" filter="fade">
+                                      <p:cBhvr>
+                                        <p:cTn id="61" dur="500"/>
+                                        <p:tgtEl>
+                                          <p:spTgt spid="3">
+                                            <p:txEl>
+                                              <p:pRg st="10" end="10"/>
+                                            </p:txEl>
+                                          </p:spTgt>
+                                        </p:tgtEl>
+                                      </p:cBhvr>
+                                    </p:animEffect>
+                                  </p:childTnLst>
+                                </p:cTn>
+                              </p:par>
+                              <p:par>
+                                <p:cTn id="62" presetID="10" presetClass="entr" presetSubtype="0" fill="hold" grpId="0" nodeType="withEffect">
+                                  <p:stCondLst>
+                                    <p:cond delay="0"/>
+                                  </p:stCondLst>
+                                  <p:childTnLst>
+                                    <p:set>
+                                      <p:cBhvr>
+                                        <p:cTn id="63" dur="1" fill="hold">
+                                          <p:stCondLst>
+                                            <p:cond delay="0"/>
+                                          </p:stCondLst>
+                                        </p:cTn>
+                                        <p:tgtEl>
+                                          <p:spTgt spid="3">
+                                            <p:txEl>
+                                              <p:pRg st="11" end="11"/>
+                                            </p:txEl>
+                                          </p:spTgt>
+                                        </p:tgtEl>
+                                        <p:attrNameLst>
+                                          <p:attrName>style.visibility</p:attrName>
+                                        </p:attrNameLst>
+                                      </p:cBhvr>
+                                      <p:to>
+                                        <p:strVal val="visible"/>
+                                      </p:to>
+                                    </p:set>
+                                    <p:animEffect transition="in" filter="fade">
+                                      <p:cBhvr>
+                                        <p:cTn id="64" dur="500"/>
+                                        <p:tgtEl>
+                                          <p:spTgt spid="3">
+                                            <p:txEl>
+                                              <p:pRg st="11" end="11"/>
+                                            </p:txEl>
+                                          </p:spTgt>
+                                        </p:tgtEl>
+                                      </p:cBhvr>
+                                    </p:animEffect>
+                                  </p:childTnLst>
+                                </p:cTn>
+                              </p:par>
+                              <p:par>
+                                <p:cTn id="65" presetID="10" presetClass="entr" presetSubtype="0" fill="hold" grpId="0" nodeType="withEffect">
+                                  <p:stCondLst>
+                                    <p:cond delay="0"/>
+                                  </p:stCondLst>
+                                  <p:childTnLst>
+                                    <p:set>
+                                      <p:cBhvr>
+                                        <p:cTn id="66" dur="1" fill="hold">
+                                          <p:stCondLst>
+                                            <p:cond delay="0"/>
+                                          </p:stCondLst>
+                                        </p:cTn>
+                                        <p:tgtEl>
+                                          <p:spTgt spid="3">
+                                            <p:txEl>
+                                              <p:pRg st="12" end="12"/>
+                                            </p:txEl>
+                                          </p:spTgt>
+                                        </p:tgtEl>
+                                        <p:attrNameLst>
+                                          <p:attrName>style.visibility</p:attrName>
+                                        </p:attrNameLst>
+                                      </p:cBhvr>
+                                      <p:to>
+                                        <p:strVal val="visible"/>
+                                      </p:to>
+                                    </p:set>
+                                    <p:animEffect transition="in" filter="fade">
+                                      <p:cBhvr>
+                                        <p:cTn id="67" dur="500"/>
+                                        <p:tgtEl>
+                                          <p:spTgt spid="3">
+                                            <p:txEl>
+                                              <p:pRg st="12" end="12"/>
+                                            </p:txEl>
+                                          </p:spTgt>
+                                        </p:tgtEl>
+                                      </p:cBhvr>
+                                    </p:animEffect>
+                                  </p:childTnLst>
+                                </p:cTn>
+                              </p:par>
+                              <p:par>
+                                <p:cTn id="68" presetID="9" presetClass="emph" presetSubtype="0" grpId="1" nodeType="withEffect">
+                                  <p:stCondLst>
+                                    <p:cond delay="0"/>
+                                  </p:stCondLst>
+                                  <p:childTnLst>
+                                    <p:set>
+                                      <p:cBhvr>
+                                        <p:cTn id="69" dur="indefinite"/>
+                                        <p:tgtEl>
+                                          <p:spTgt spid="3">
+                                            <p:txEl>
+                                              <p:pRg st="6" end="6"/>
+                                            </p:txEl>
+                                          </p:spTgt>
+                                        </p:tgtEl>
+                                        <p:attrNameLst>
+                                          <p:attrName>style.opacity</p:attrName>
+                                        </p:attrNameLst>
+                                      </p:cBhvr>
+                                      <p:to>
+                                        <p:strVal val="0.5"/>
+                                      </p:to>
+                                    </p:set>
+                                    <p:animEffect filter="image" prLst="opacity: 0.5">
+                                      <p:cBhvr rctx="IE">
+                                        <p:cTn id="70" dur="indefinite"/>
+                                        <p:tgtEl>
+                                          <p:spTgt spid="3">
+                                            <p:txEl>
+                                              <p:pRg st="6" end="6"/>
+                                            </p:txEl>
+                                          </p:spTgt>
+                                        </p:tgtEl>
+                                      </p:cBhvr>
+                                    </p:animEffect>
+                                  </p:childTnLst>
+                                </p:cTn>
+                              </p:par>
+                              <p:par>
+                                <p:cTn id="71" presetID="9" presetClass="emph" presetSubtype="0" grpId="1" nodeType="withEffect">
+                                  <p:stCondLst>
+                                    <p:cond delay="0"/>
+                                  </p:stCondLst>
+                                  <p:childTnLst>
+                                    <p:set>
+                                      <p:cBhvr>
+                                        <p:cTn id="72" dur="indefinite"/>
+                                        <p:tgtEl>
+                                          <p:spTgt spid="3">
+                                            <p:txEl>
+                                              <p:pRg st="7" end="7"/>
+                                            </p:txEl>
+                                          </p:spTgt>
+                                        </p:tgtEl>
+                                        <p:attrNameLst>
+                                          <p:attrName>style.opacity</p:attrName>
+                                        </p:attrNameLst>
+                                      </p:cBhvr>
+                                      <p:to>
+                                        <p:strVal val="0.5"/>
+                                      </p:to>
+                                    </p:set>
+                                    <p:animEffect filter="image" prLst="opacity: 0.5">
+                                      <p:cBhvr rctx="IE">
+                                        <p:cTn id="73" dur="indefinite"/>
+                                        <p:tgtEl>
+                                          <p:spTgt spid="3">
+                                            <p:txEl>
+                                              <p:pRg st="7" end="7"/>
+                                            </p:txEl>
+                                          </p:spTgt>
+                                        </p:tgtEl>
+                                      </p:cBhvr>
+                                    </p:animEffect>
+                                  </p:childTnLst>
+                                </p:cTn>
+                              </p:par>
+                              <p:par>
+                                <p:cTn id="74" presetID="9" presetClass="emph" presetSubtype="0" grpId="1" nodeType="withEffect">
+                                  <p:stCondLst>
+                                    <p:cond delay="0"/>
+                                  </p:stCondLst>
+                                  <p:childTnLst>
+                                    <p:set>
+                                      <p:cBhvr>
+                                        <p:cTn id="75" dur="indefinite"/>
+                                        <p:tgtEl>
+                                          <p:spTgt spid="3">
+                                            <p:txEl>
+                                              <p:pRg st="8" end="8"/>
+                                            </p:txEl>
+                                          </p:spTgt>
+                                        </p:tgtEl>
+                                        <p:attrNameLst>
+                                          <p:attrName>style.opacity</p:attrName>
+                                        </p:attrNameLst>
+                                      </p:cBhvr>
+                                      <p:to>
+                                        <p:strVal val="0.5"/>
+                                      </p:to>
+                                    </p:set>
+                                    <p:animEffect filter="image" prLst="opacity: 0.5">
+                                      <p:cBhvr rctx="IE">
+                                        <p:cTn id="76" dur="indefinite"/>
+                                        <p:tgtEl>
+                                          <p:spTgt spid="3">
+                                            <p:txEl>
+                                              <p:pRg st="8" end="8"/>
+                                            </p:txEl>
+                                          </p:spTgt>
+                                        </p:tgtEl>
+                                      </p:cBhvr>
+                                    </p:animEffect>
+                                  </p:childTnLst>
+                                </p:cTn>
+                              </p:par>
+                            </p:childTnLst>
+                          </p:cTn>
+                        </p:par>
+                      </p:childTnLst>
+                    </p:cTn>
+                  </p:par>
+                  <p:par>
+                    <p:cTn id="77" fill="hold">
+                      <p:stCondLst>
+                        <p:cond delay="indefinite"/>
+                      </p:stCondLst>
+                      <p:childTnLst>
+                        <p:par>
+                          <p:cTn id="78" fill="hold">
+                            <p:stCondLst>
+                              <p:cond delay="0"/>
+                            </p:stCondLst>
+                            <p:childTnLst>
+                              <p:par>
+                                <p:cTn id="79" presetID="10" presetClass="entr" presetSubtype="0" fill="hold" grpId="0" nodeType="clickEffect">
+                                  <p:stCondLst>
+                                    <p:cond delay="0"/>
+                                  </p:stCondLst>
+                                  <p:childTnLst>
+                                    <p:set>
+                                      <p:cBhvr>
+                                        <p:cTn id="80" dur="1" fill="hold">
+                                          <p:stCondLst>
+                                            <p:cond delay="0"/>
+                                          </p:stCondLst>
+                                        </p:cTn>
+                                        <p:tgtEl>
+                                          <p:spTgt spid="3">
+                                            <p:txEl>
+                                              <p:pRg st="13" end="13"/>
+                                            </p:txEl>
+                                          </p:spTgt>
+                                        </p:tgtEl>
+                                        <p:attrNameLst>
+                                          <p:attrName>style.visibility</p:attrName>
+                                        </p:attrNameLst>
+                                      </p:cBhvr>
+                                      <p:to>
+                                        <p:strVal val="visible"/>
+                                      </p:to>
+                                    </p:set>
+                                    <p:animEffect transition="in" filter="fade">
+                                      <p:cBhvr>
+                                        <p:cTn id="81" dur="500"/>
+                                        <p:tgtEl>
+                                          <p:spTgt spid="3">
+                                            <p:txEl>
+                                              <p:pRg st="13" end="13"/>
+                                            </p:txEl>
+                                          </p:spTgt>
+                                        </p:tgtEl>
+                                      </p:cBhvr>
+                                    </p:animEffect>
+                                  </p:childTnLst>
+                                </p:cTn>
+                              </p:par>
+                              <p:par>
+                                <p:cTn id="82" presetID="9" presetClass="emph" presetSubtype="0" grpId="1" nodeType="withEffect">
+                                  <p:stCondLst>
+                                    <p:cond delay="0"/>
+                                  </p:stCondLst>
+                                  <p:childTnLst>
+                                    <p:set>
+                                      <p:cBhvr>
+                                        <p:cTn id="83" dur="indefinite"/>
+                                        <p:tgtEl>
+                                          <p:spTgt spid="3">
+                                            <p:txEl>
+                                              <p:pRg st="9" end="9"/>
+                                            </p:txEl>
+                                          </p:spTgt>
+                                        </p:tgtEl>
+                                        <p:attrNameLst>
+                                          <p:attrName>style.opacity</p:attrName>
+                                        </p:attrNameLst>
+                                      </p:cBhvr>
+                                      <p:to>
+                                        <p:strVal val="0.5"/>
+                                      </p:to>
+                                    </p:set>
+                                    <p:animEffect filter="image" prLst="opacity: 0.5">
+                                      <p:cBhvr rctx="IE">
+                                        <p:cTn id="84" dur="indefinite"/>
+                                        <p:tgtEl>
+                                          <p:spTgt spid="3">
+                                            <p:txEl>
+                                              <p:pRg st="9" end="9"/>
+                                            </p:txEl>
+                                          </p:spTgt>
+                                        </p:tgtEl>
+                                      </p:cBhvr>
+                                    </p:animEffect>
+                                  </p:childTnLst>
+                                </p:cTn>
+                              </p:par>
+                              <p:par>
+                                <p:cTn id="85" presetID="9" presetClass="emph" presetSubtype="0" grpId="1" nodeType="withEffect">
+                                  <p:stCondLst>
+                                    <p:cond delay="0"/>
+                                  </p:stCondLst>
+                                  <p:childTnLst>
+                                    <p:set>
+                                      <p:cBhvr>
+                                        <p:cTn id="86" dur="indefinite"/>
+                                        <p:tgtEl>
+                                          <p:spTgt spid="3">
+                                            <p:txEl>
+                                              <p:pRg st="10" end="10"/>
+                                            </p:txEl>
+                                          </p:spTgt>
+                                        </p:tgtEl>
+                                        <p:attrNameLst>
+                                          <p:attrName>style.opacity</p:attrName>
+                                        </p:attrNameLst>
+                                      </p:cBhvr>
+                                      <p:to>
+                                        <p:strVal val="0.5"/>
+                                      </p:to>
+                                    </p:set>
+                                    <p:animEffect filter="image" prLst="opacity: 0.5">
+                                      <p:cBhvr rctx="IE">
+                                        <p:cTn id="87" dur="indefinite"/>
+                                        <p:tgtEl>
+                                          <p:spTgt spid="3">
+                                            <p:txEl>
+                                              <p:pRg st="10" end="10"/>
+                                            </p:txEl>
+                                          </p:spTgt>
+                                        </p:tgtEl>
+                                      </p:cBhvr>
+                                    </p:animEffect>
+                                  </p:childTnLst>
+                                </p:cTn>
+                              </p:par>
+                              <p:par>
+                                <p:cTn id="88" presetID="9" presetClass="emph" presetSubtype="0" grpId="1" nodeType="withEffect">
+                                  <p:stCondLst>
+                                    <p:cond delay="0"/>
+                                  </p:stCondLst>
+                                  <p:childTnLst>
+                                    <p:set>
+                                      <p:cBhvr>
+                                        <p:cTn id="89" dur="indefinite"/>
+                                        <p:tgtEl>
+                                          <p:spTgt spid="3">
+                                            <p:txEl>
+                                              <p:pRg st="11" end="11"/>
+                                            </p:txEl>
+                                          </p:spTgt>
+                                        </p:tgtEl>
+                                        <p:attrNameLst>
+                                          <p:attrName>style.opacity</p:attrName>
+                                        </p:attrNameLst>
+                                      </p:cBhvr>
+                                      <p:to>
+                                        <p:strVal val="0.5"/>
+                                      </p:to>
+                                    </p:set>
+                                    <p:animEffect filter="image" prLst="opacity: 0.5">
+                                      <p:cBhvr rctx="IE">
+                                        <p:cTn id="90" dur="indefinite"/>
+                                        <p:tgtEl>
+                                          <p:spTgt spid="3">
+                                            <p:txEl>
+                                              <p:pRg st="11" end="11"/>
+                                            </p:txEl>
+                                          </p:spTgt>
+                                        </p:tgtEl>
+                                      </p:cBhvr>
+                                    </p:animEffect>
+                                  </p:childTnLst>
+                                </p:cTn>
+                              </p:par>
+                              <p:par>
+                                <p:cTn id="91" presetID="9" presetClass="emph" presetSubtype="0" grpId="1" nodeType="withEffect">
+                                  <p:stCondLst>
+                                    <p:cond delay="0"/>
+                                  </p:stCondLst>
+                                  <p:childTnLst>
+                                    <p:set>
+                                      <p:cBhvr>
+                                        <p:cTn id="92" dur="indefinite"/>
+                                        <p:tgtEl>
+                                          <p:spTgt spid="3">
+                                            <p:txEl>
+                                              <p:pRg st="12" end="12"/>
+                                            </p:txEl>
+                                          </p:spTgt>
+                                        </p:tgtEl>
+                                        <p:attrNameLst>
+                                          <p:attrName>style.opacity</p:attrName>
+                                        </p:attrNameLst>
+                                      </p:cBhvr>
+                                      <p:to>
+                                        <p:strVal val="0.5"/>
+                                      </p:to>
+                                    </p:set>
+                                    <p:animEffect filter="image" prLst="opacity: 0.5">
+                                      <p:cBhvr rctx="IE">
+                                        <p:cTn id="93" dur="indefinite"/>
+                                        <p:tgtEl>
+                                          <p:spTgt spid="3">
+                                            <p:txEl>
+                                              <p:pRg st="12" end="12"/>
+                                            </p:txEl>
+                                          </p:spTgt>
+                                        </p:tgtEl>
+                                      </p:cBhvr>
+                                    </p:animEffect>
+                                  </p:childTnLst>
+                                </p:cTn>
+                              </p:par>
+                            </p:childTnLst>
+                          </p:cTn>
+                        </p:par>
+                      </p:childTnLst>
+                    </p:cTn>
+                  </p:par>
+                </p:childTnLst>
+              </p:cTn>
+              <p:prevCondLst>
+                <p:cond evt="onPrev" delay="0">
+                  <p:tgtEl>
+                    <p:sldTgt/>
+                  </p:tgtEl>
+                </p:cond>
+              </p:prevCondLst>
+              <p:nextCondLst>
+                <p:cond evt="onNext" delay="0">
+                  <p:tgtEl>
+                    <p:sldTgt/>
+                  </p:tgtEl>
+                </p:cond>
+              </p:nextCondLst>
+            </p:seq>
+          </p:childTnLst>
+        </p:cTn>
+      </p:par>
+    </p:tnLst>
+    <p:bldLst>
+      <p:bldP spid="3" grpId="0" uiExpand="1" build="p"/>
+      <p:bldP spid="3" grpId="1" uiExpand="1" build="p"/>
+    </p:bldLst>
+  </p:timing>
+</p:sld>
+</file>
+
+<file path=ppt/slides/slide26.xml><?xml version="1.0" encoding="utf-8"?>
 <p:sld xmlns:a="http://schemas.openxmlformats.org/drawingml/2006/main" xmlns:r="http://schemas.openxmlformats.org/officeDocument/2006/relationships" xmlns:p="http://schemas.openxmlformats.org/presentationml/2006/main">
   <p:cSld>
     <p:spTree>
@@ -28097,15 +30500,6 @@
 </file>
 
 <file path=customXml/item1.xml><?xml version="1.0" encoding="utf-8"?>
-<?mso-contentType ?>
-<FormTemplates xmlns="http://schemas.microsoft.com/sharepoint/v3/contenttype/forms">
-  <Display>DocumentLibraryForm</Display>
-  <Edit>DocumentLibraryForm</Edit>
-  <New>DocumentLibraryForm</New>
-</FormTemplates>
-</file>
-
-<file path=customXml/item2.xml><?xml version="1.0" encoding="utf-8"?>
 <p:properties xmlns:p="http://schemas.microsoft.com/office/2006/metadata/properties" xmlns:xsi="http://www.w3.org/2001/XMLSchema-instance" xmlns:pc="http://schemas.microsoft.com/office/infopath/2007/PartnerControls">
   <documentManagement>
     <lcf76f155ced4ddcb4097134ff3c332f xmlns="abdc9a1f-962e-4235-838d-61f9c438f4db">
@@ -28114,6 +30508,15 @@
     <TaxCatchAll xmlns="de47e97d-64fd-4aef-b10e-fd7d6cfcfcf4" xsi:nil="true"/>
   </documentManagement>
 </p:properties>
+</file>
+
+<file path=customXml/item2.xml><?xml version="1.0" encoding="utf-8"?>
+<?mso-contentType ?>
+<FormTemplates xmlns="http://schemas.microsoft.com/sharepoint/v3/contenttype/forms">
+  <Display>DocumentLibraryForm</Display>
+  <Edit>DocumentLibraryForm</Edit>
+  <New>DocumentLibraryForm</New>
+</FormTemplates>
 </file>
 
 <file path=customXml/item3.xml><?xml version="1.0" encoding="utf-8"?>
@@ -28324,14 +30727,6 @@
 </file>
 
 <file path=customXml/itemProps1.xml><?xml version="1.0" encoding="utf-8"?>
-<ds:datastoreItem xmlns:ds="http://schemas.openxmlformats.org/officeDocument/2006/customXml" ds:itemID="{57D9B22B-F436-4FE5-B6C0-65AB2260F593}">
-  <ds:schemaRefs>
-    <ds:schemaRef ds:uri="http://schemas.microsoft.com/sharepoint/v3/contenttype/forms"/>
-  </ds:schemaRefs>
-</ds:datastoreItem>
-</file>
-
-<file path=customXml/itemProps2.xml><?xml version="1.0" encoding="utf-8"?>
 <ds:datastoreItem xmlns:ds="http://schemas.openxmlformats.org/officeDocument/2006/customXml" ds:itemID="{AA9C06E3-346E-408E-B352-32E922A070CE}">
   <ds:schemaRefs>
     <ds:schemaRef ds:uri="2347cc20-e10c-452d-848a-c18e83138525"/>
@@ -28342,6 +30737,14 @@
     <ds:schemaRef ds:uri="de47e97d-64fd-4aef-b10e-fd7d6cfcfcf4"/>
     <ds:schemaRef ds:uri="http://schemas.microsoft.com/office/2006/metadata/properties"/>
     <ds:schemaRef ds:uri="http://schemas.microsoft.com/office/infopath/2007/PartnerControls"/>
+  </ds:schemaRefs>
+</ds:datastoreItem>
+</file>
+
+<file path=customXml/itemProps2.xml><?xml version="1.0" encoding="utf-8"?>
+<ds:datastoreItem xmlns:ds="http://schemas.openxmlformats.org/officeDocument/2006/customXml" ds:itemID="{57D9B22B-F436-4FE5-B6C0-65AB2260F593}">
+  <ds:schemaRefs>
+    <ds:schemaRef ds:uri="http://schemas.microsoft.com/sharepoint/v3/contenttype/forms"/>
   </ds:schemaRefs>
 </ds:datastoreItem>
 </file>

--- a/2026/OpenSourceModulesInCSharp/PSCONFEU26_EmanuelPalm_OpenSourceModulesInCSharp.pptx
+++ b/2026/OpenSourceModulesInCSharp/PSCONFEU26_EmanuelPalm_OpenSourceModulesInCSharp.pptx
@@ -12591,15 +12591,17 @@
           </a:xfrm>
         </p:spPr>
         <p:txBody>
-          <a:bodyPr/>
+          <a:bodyPr>
+            <a:normAutofit/>
+          </a:bodyPr>
           <a:lstStyle/>
           <a:p>
             <a:pPr marL="0" indent="0">
               <a:buNone/>
             </a:pPr>
             <a:r>
-              <a:rPr lang="en-US" dirty="0"/>
-              <a:t>Unless you need new .NET APIs</a:t>
+              <a:rPr lang="en-US" sz="3200" dirty="0"/>
+              <a:t>Unless you need new .NET APIs or your dependencies do</a:t>
             </a:r>
           </a:p>
         </p:txBody>

--- a/2026/OpenSourceModulesInCSharp/PSCONFEU26_EmanuelPalm_OpenSourceModulesInCSharp.pptx
+++ b/2026/OpenSourceModulesInCSharp/PSCONFEU26_EmanuelPalm_OpenSourceModulesInCSharp.pptx
@@ -278,7 +278,7 @@
           <a:p>
             <a:fld id="{69440670-43D7-400A-ABC5-B69E064DBB37}" type="datetimeFigureOut">
               <a:rPr lang="en-GB" smtClean="0"/>
-              <a:t>14/05/2026</a:t>
+              <a:t>02/06/2026</a:t>
             </a:fld>
             <a:endParaRPr lang="en-GB"/>
           </a:p>
@@ -537,7 +537,7 @@
           <a:p>
             <a:fld id="{611B03A4-75C9-4E3D-9183-2102CA9AEC33}" type="datetimeFigureOut">
               <a:rPr lang="en-GB" smtClean="0"/>
-              <a:t>14/05/2026</a:t>
+              <a:t>02/06/2026</a:t>
             </a:fld>
             <a:endParaRPr lang="en-GB"/>
           </a:p>
@@ -22045,39 +22045,26 @@
             </a:r>
           </a:p>
           <a:p>
-            <a:pPr marL="0" marR="0" lvl="0" indent="0" algn="l" defTabSz="914400" rtl="0" eaLnBrk="1" fontAlgn="auto" latinLnBrk="0" hangingPunct="1">
-              <a:lnSpc>
-                <a:spcPct val="100000"/>
-              </a:lnSpc>
-              <a:spcBef>
-                <a:spcPts val="0"/>
-              </a:spcBef>
-              <a:spcAft>
-                <a:spcPts val="0"/>
-              </a:spcAft>
-              <a:buClrTx/>
-              <a:buSzTx/>
-              <a:buFontTx/>
-              <a:buNone/>
-              <a:tabLst/>
+            <a:pPr lvl="0">
               <a:defRPr/>
             </a:pPr>
             <a:r>
-              <a:rPr kumimoji="0" lang="en-US" sz="1800" b="0" i="0" u="none" strike="noStrike" kern="1200" cap="none" spc="0" normalizeH="0" baseline="0" noProof="0" dirty="0">
-                <a:ln>
-                  <a:noFill/>
-                </a:ln>
+              <a:rPr lang="en-US" dirty="0">
                 <a:solidFill>
                   <a:srgbClr val="CCCCCC"/>
                 </a:solidFill>
-                <a:effectLst/>
-                <a:uLnTx/>
-                <a:uFillTx/>
-                <a:latin typeface="CaskaydiaCove NF" panose="02000009000000000000" pitchFamily="50" charset="0"/>
-                <a:ea typeface="+mn-ea"/>
-                <a:cs typeface="+mn-cs"/>
+                <a:latin typeface="CaskaydiaCove NF" panose="02000009000000000000" pitchFamily="50" charset="0"/>
               </a:rPr>
               <a:t>    </a:t>
+            </a:r>
+            <a:r>
+              <a:rPr lang="en-US" dirty="0">
+                <a:solidFill>
+                  <a:srgbClr val="DCDCAA"/>
+                </a:solidFill>
+                <a:latin typeface="CaskaydiaCove NF" panose="02000009000000000000" pitchFamily="50" charset="0"/>
+              </a:rPr>
+              <a:t>Write-Object </a:t>
             </a:r>
             <a:r>
               <a:rPr kumimoji="0" lang="en-US" sz="1800" b="0" i="0" u="none" strike="noStrike" kern="1200" cap="none" spc="0" normalizeH="0" baseline="0" noProof="0" dirty="0">
@@ -30502,6 +30489,15 @@
 </file>
 
 <file path=customXml/item1.xml><?xml version="1.0" encoding="utf-8"?>
+<?mso-contentType ?>
+<FormTemplates xmlns="http://schemas.microsoft.com/sharepoint/v3/contenttype/forms">
+  <Display>DocumentLibraryForm</Display>
+  <Edit>DocumentLibraryForm</Edit>
+  <New>DocumentLibraryForm</New>
+</FormTemplates>
+</file>
+
+<file path=customXml/item2.xml><?xml version="1.0" encoding="utf-8"?>
 <p:properties xmlns:p="http://schemas.microsoft.com/office/2006/metadata/properties" xmlns:xsi="http://www.w3.org/2001/XMLSchema-instance" xmlns:pc="http://schemas.microsoft.com/office/infopath/2007/PartnerControls">
   <documentManagement>
     <lcf76f155ced4ddcb4097134ff3c332f xmlns="abdc9a1f-962e-4235-838d-61f9c438f4db">
@@ -30510,15 +30506,6 @@
     <TaxCatchAll xmlns="de47e97d-64fd-4aef-b10e-fd7d6cfcfcf4" xsi:nil="true"/>
   </documentManagement>
 </p:properties>
-</file>
-
-<file path=customXml/item2.xml><?xml version="1.0" encoding="utf-8"?>
-<?mso-contentType ?>
-<FormTemplates xmlns="http://schemas.microsoft.com/sharepoint/v3/contenttype/forms">
-  <Display>DocumentLibraryForm</Display>
-  <Edit>DocumentLibraryForm</Edit>
-  <New>DocumentLibraryForm</New>
-</FormTemplates>
 </file>
 
 <file path=customXml/item3.xml><?xml version="1.0" encoding="utf-8"?>
@@ -30729,6 +30716,14 @@
 </file>
 
 <file path=customXml/itemProps1.xml><?xml version="1.0" encoding="utf-8"?>
+<ds:datastoreItem xmlns:ds="http://schemas.openxmlformats.org/officeDocument/2006/customXml" ds:itemID="{57D9B22B-F436-4FE5-B6C0-65AB2260F593}">
+  <ds:schemaRefs>
+    <ds:schemaRef ds:uri="http://schemas.microsoft.com/sharepoint/v3/contenttype/forms"/>
+  </ds:schemaRefs>
+</ds:datastoreItem>
+</file>
+
+<file path=customXml/itemProps2.xml><?xml version="1.0" encoding="utf-8"?>
 <ds:datastoreItem xmlns:ds="http://schemas.openxmlformats.org/officeDocument/2006/customXml" ds:itemID="{AA9C06E3-346E-408E-B352-32E922A070CE}">
   <ds:schemaRefs>
     <ds:schemaRef ds:uri="2347cc20-e10c-452d-848a-c18e83138525"/>
@@ -30739,14 +30734,6 @@
     <ds:schemaRef ds:uri="de47e97d-64fd-4aef-b10e-fd7d6cfcfcf4"/>
     <ds:schemaRef ds:uri="http://schemas.microsoft.com/office/2006/metadata/properties"/>
     <ds:schemaRef ds:uri="http://schemas.microsoft.com/office/infopath/2007/PartnerControls"/>
-  </ds:schemaRefs>
-</ds:datastoreItem>
-</file>
-
-<file path=customXml/itemProps2.xml><?xml version="1.0" encoding="utf-8"?>
-<ds:datastoreItem xmlns:ds="http://schemas.openxmlformats.org/officeDocument/2006/customXml" ds:itemID="{57D9B22B-F436-4FE5-B6C0-65AB2260F593}">
-  <ds:schemaRefs>
-    <ds:schemaRef ds:uri="http://schemas.microsoft.com/sharepoint/v3/contenttype/forms"/>
   </ds:schemaRefs>
 </ds:datastoreItem>
 </file>
